--- a/capacitaciones/prospeccion/Prospeccion-Tecnicas-Avanzadas.pptx
+++ b/capacitaciones/prospeccion/Prospeccion-Tecnicas-Avanzadas.pptx
@@ -2092,9 +2092,9 @@
                 <a:solidFill>
                   <a:srgbClr val="FFFFFF"/>
                 </a:solidFill>
-                <a:latin typeface="Arial" pitchFamily="34" charset="0"/>
-                <a:ea typeface="Arial" pitchFamily="34" charset="-122"/>
-                <a:cs typeface="Arial" pitchFamily="34" charset="-120"/>
+                <a:latin typeface="Inter" pitchFamily="34" charset="0"/>
+                <a:ea typeface="Inter" pitchFamily="34" charset="-122"/>
+                <a:cs typeface="Inter" pitchFamily="34" charset="-120"/>
               </a:rPr>
               <a:t>Capacitaciones Krak Real Estate</a:t>
             </a:r>
@@ -2134,9 +2134,9 @@
                 <a:solidFill>
                   <a:srgbClr val="FFFFFF"/>
                 </a:solidFill>
-                <a:latin typeface="Arial" pitchFamily="34" charset="0"/>
-                <a:ea typeface="Arial" pitchFamily="34" charset="-122"/>
-                <a:cs typeface="Arial" pitchFamily="34" charset="-120"/>
+                <a:latin typeface="Inter" pitchFamily="34" charset="0"/>
+                <a:ea typeface="Inter" pitchFamily="34" charset="-122"/>
+                <a:cs typeface="Inter" pitchFamily="34" charset="-120"/>
               </a:rPr>
               <a:t>Técnicas Avanzadas de Prospección Inmobiliaria</a:t>
             </a:r>
@@ -2173,9 +2173,9 @@
                 <a:solidFill>
                   <a:srgbClr val="D9E4F0"/>
                 </a:solidFill>
-                <a:latin typeface="Arial" pitchFamily="34" charset="0"/>
-                <a:ea typeface="Arial" pitchFamily="34" charset="-122"/>
-                <a:cs typeface="Arial" pitchFamily="34" charset="-120"/>
+                <a:latin typeface="Inter" pitchFamily="34" charset="0"/>
+                <a:ea typeface="Inter" pitchFamily="34" charset="-122"/>
+                <a:cs typeface="Inter" pitchFamily="34" charset="-120"/>
               </a:rPr>
               <a:t>Cómo encontrar, calificar y sostener prospectos de forma sistemática.</a:t>
             </a:r>
@@ -2325,9 +2325,9 @@
                 <a:solidFill>
                   <a:srgbClr val="08407C"/>
                 </a:solidFill>
-                <a:latin typeface="Arial" pitchFamily="34" charset="0"/>
-                <a:ea typeface="Arial" pitchFamily="34" charset="-122"/>
-                <a:cs typeface="Arial" pitchFamily="34" charset="-120"/>
+                <a:latin typeface="Inter" pitchFamily="34" charset="0"/>
+                <a:ea typeface="Inter" pitchFamily="34" charset="-122"/>
+                <a:cs typeface="Inter" pitchFamily="34" charset="-120"/>
               </a:rPr>
               <a:t>Calificación de los prospectos</a:t>
             </a:r>
@@ -2364,9 +2364,9 @@
                 <a:solidFill>
                   <a:srgbClr val="6A7686"/>
                 </a:solidFill>
-                <a:latin typeface="Arial" pitchFamily="34" charset="0"/>
-                <a:ea typeface="Arial" pitchFamily="34" charset="-122"/>
-                <a:cs typeface="Arial" pitchFamily="34" charset="-120"/>
+                <a:latin typeface="Inter" pitchFamily="34" charset="0"/>
+                <a:ea typeface="Inter" pitchFamily="34" charset="-122"/>
+                <a:cs typeface="Inter" pitchFamily="34" charset="-120"/>
               </a:rPr>
               <a:t>Técnica PATI: otra forma de medir para concientizar.</a:t>
             </a:r>
@@ -2430,9 +2430,9 @@
                 <a:solidFill>
                   <a:srgbClr val="6A7686"/>
                 </a:solidFill>
-                <a:latin typeface="Arial" pitchFamily="34" charset="0"/>
-                <a:ea typeface="Arial" pitchFamily="34" charset="-122"/>
-                <a:cs typeface="Arial" pitchFamily="34" charset="-120"/>
+                <a:latin typeface="Inter" pitchFamily="34" charset="0"/>
+                <a:ea typeface="Inter" pitchFamily="34" charset="-122"/>
+                <a:cs typeface="Inter" pitchFamily="34" charset="-120"/>
               </a:rPr>
               <a:t>P</a:t>
             </a:r>
@@ -2496,9 +2496,9 @@
                 <a:solidFill>
                   <a:srgbClr val="FFFFFF"/>
                 </a:solidFill>
-                <a:latin typeface="Arial" pitchFamily="34" charset="0"/>
-                <a:ea typeface="Arial" pitchFamily="34" charset="-122"/>
-                <a:cs typeface="Arial" pitchFamily="34" charset="-120"/>
+                <a:latin typeface="Inter" pitchFamily="34" charset="0"/>
+                <a:ea typeface="Inter" pitchFamily="34" charset="-122"/>
+                <a:cs typeface="Inter" pitchFamily="34" charset="-120"/>
               </a:rPr>
               <a:t>A</a:t>
             </a:r>
@@ -2562,9 +2562,9 @@
                 <a:solidFill>
                   <a:srgbClr val="6A7686"/>
                 </a:solidFill>
-                <a:latin typeface="Arial" pitchFamily="34" charset="0"/>
-                <a:ea typeface="Arial" pitchFamily="34" charset="-122"/>
-                <a:cs typeface="Arial" pitchFamily="34" charset="-120"/>
+                <a:latin typeface="Inter" pitchFamily="34" charset="0"/>
+                <a:ea typeface="Inter" pitchFamily="34" charset="-122"/>
+                <a:cs typeface="Inter" pitchFamily="34" charset="-120"/>
               </a:rPr>
               <a:t>T</a:t>
             </a:r>
@@ -2628,9 +2628,9 @@
                 <a:solidFill>
                   <a:srgbClr val="6A7686"/>
                 </a:solidFill>
-                <a:latin typeface="Arial" pitchFamily="34" charset="0"/>
-                <a:ea typeface="Arial" pitchFamily="34" charset="-122"/>
-                <a:cs typeface="Arial" pitchFamily="34" charset="-120"/>
+                <a:latin typeface="Inter" pitchFamily="34" charset="0"/>
+                <a:ea typeface="Inter" pitchFamily="34" charset="-122"/>
+                <a:cs typeface="Inter" pitchFamily="34" charset="-120"/>
               </a:rPr>
               <a:t>I</a:t>
             </a:r>
@@ -2694,9 +2694,9 @@
                 <a:solidFill>
                   <a:srgbClr val="FFFFFF"/>
                 </a:solidFill>
-                <a:latin typeface="Arial" pitchFamily="34" charset="0"/>
-                <a:ea typeface="Arial" pitchFamily="34" charset="-122"/>
-                <a:cs typeface="Arial" pitchFamily="34" charset="-120"/>
+                <a:latin typeface="Inter" pitchFamily="34" charset="0"/>
+                <a:ea typeface="Inter" pitchFamily="34" charset="-122"/>
+                <a:cs typeface="Inter" pitchFamily="34" charset="-120"/>
               </a:rPr>
               <a:t>A</a:t>
             </a:r>
@@ -2733,9 +2733,9 @@
                 <a:solidFill>
                   <a:srgbClr val="FFFFFF"/>
                 </a:solidFill>
-                <a:latin typeface="Arial" pitchFamily="34" charset="0"/>
-                <a:ea typeface="Arial" pitchFamily="34" charset="-122"/>
-                <a:cs typeface="Arial" pitchFamily="34" charset="-120"/>
+                <a:latin typeface="Inter" pitchFamily="34" charset="0"/>
+                <a:ea typeface="Inter" pitchFamily="34" charset="-122"/>
+                <a:cs typeface="Inter" pitchFamily="34" charset="-120"/>
               </a:rPr>
               <a:t>Autoridad</a:t>
             </a:r>
@@ -2773,11 +2773,11 @@
             <a:r>
               <a:rPr lang="en-US" sz="1050" dirty="0">
                 <a:solidFill>
-                  <a:srgbClr val="DCE6F2"/>
-                </a:solidFill>
-                <a:latin typeface="Arial" pitchFamily="34" charset="0"/>
-                <a:ea typeface="Arial" pitchFamily="34" charset="-122"/>
-                <a:cs typeface="Arial" pitchFamily="34" charset="-120"/>
+                  <a:srgbClr val="CDD8E4"/>
+                </a:solidFill>
+                <a:latin typeface="Inter" pitchFamily="34" charset="0"/>
+                <a:ea typeface="Inter" pitchFamily="34" charset="-122"/>
+                <a:cs typeface="Inter" pitchFamily="34" charset="-120"/>
               </a:rPr>
               <a:t>Preguntas para calificar</a:t>
             </a:r>
@@ -2802,11 +2802,11 @@
             </a:avLst>
           </a:prstGeom>
           <a:solidFill>
-            <a:srgbClr val="F2F4F7"/>
+            <a:srgbClr val="F3F3F3"/>
           </a:solidFill>
           <a:ln w="12700">
             <a:solidFill>
-              <a:srgbClr val="F2F4F7"/>
+              <a:srgbClr val="F3F3F3"/>
             </a:solidFill>
             <a:prstDash val="solid"/>
           </a:ln>
@@ -2844,9 +2844,9 @@
                 <a:solidFill>
                   <a:srgbClr val="2E4258"/>
                 </a:solidFill>
-                <a:latin typeface="Arial" pitchFamily="34" charset="0"/>
-                <a:ea typeface="Arial" pitchFamily="34" charset="-122"/>
-                <a:cs typeface="Arial" pitchFamily="34" charset="-120"/>
+                <a:latin typeface="Inter" pitchFamily="34" charset="0"/>
+                <a:ea typeface="Inter" pitchFamily="34" charset="-122"/>
+                <a:cs typeface="Inter" pitchFamily="34" charset="-120"/>
               </a:rPr>
               <a:t>¿Puede decidir o necesita consenso con otros?</a:t>
             </a:r>
@@ -2886,9 +2886,9 @@
                 <a:solidFill>
                   <a:srgbClr val="2E4258"/>
                 </a:solidFill>
-                <a:latin typeface="Arial" pitchFamily="34" charset="0"/>
-                <a:ea typeface="Arial" pitchFamily="34" charset="-122"/>
-                <a:cs typeface="Arial" pitchFamily="34" charset="-120"/>
+                <a:latin typeface="Inter" pitchFamily="34" charset="0"/>
+                <a:ea typeface="Inter" pitchFamily="34" charset="-122"/>
+                <a:cs typeface="Inter" pitchFamily="34" charset="-120"/>
               </a:rPr>
               <a:t>¿Vos tomás la decisión o lo conversás con alguien más?</a:t>
             </a:r>
@@ -2913,11 +2913,11 @@
             </a:avLst>
           </a:prstGeom>
           <a:solidFill>
-            <a:srgbClr val="F2F4F7"/>
+            <a:srgbClr val="F3F3F3"/>
           </a:solidFill>
           <a:ln w="12700">
             <a:solidFill>
-              <a:srgbClr val="F2F4F7"/>
+              <a:srgbClr val="F3F3F3"/>
             </a:solidFill>
             <a:prstDash val="solid"/>
           </a:ln>
@@ -2955,9 +2955,9 @@
                 <a:solidFill>
                   <a:srgbClr val="2E4258"/>
                 </a:solidFill>
-                <a:latin typeface="Arial" pitchFamily="34" charset="0"/>
-                <a:ea typeface="Arial" pitchFamily="34" charset="-122"/>
-                <a:cs typeface="Arial" pitchFamily="34" charset="-120"/>
+                <a:latin typeface="Inter" pitchFamily="34" charset="0"/>
+                <a:ea typeface="Inter" pitchFamily="34" charset="-122"/>
+                <a:cs typeface="Inter" pitchFamily="34" charset="-120"/>
               </a:rPr>
               <a:t>¿Están todos los herederos de acuerdo, o los copropietarios?</a:t>
             </a:r>
@@ -3021,9 +3021,9 @@
                 <a:solidFill>
                   <a:srgbClr val="FFFFFF"/>
                 </a:solidFill>
-                <a:latin typeface="Arial" pitchFamily="34" charset="0"/>
-                <a:ea typeface="Arial" pitchFamily="34" charset="-122"/>
-                <a:cs typeface="Arial" pitchFamily="34" charset="-120"/>
+                <a:latin typeface="Inter" pitchFamily="34" charset="0"/>
+                <a:ea typeface="Inter" pitchFamily="34" charset="-122"/>
+                <a:cs typeface="Inter" pitchFamily="34" charset="-120"/>
               </a:rPr>
               <a:t>LA PREGUNTA DE FONDO</a:t>
             </a:r>
@@ -3063,9 +3063,9 @@
                 <a:solidFill>
                   <a:srgbClr val="FFFFFF"/>
                 </a:solidFill>
-                <a:latin typeface="Arial" pitchFamily="34" charset="0"/>
-                <a:ea typeface="Arial" pitchFamily="34" charset="-122"/>
-                <a:cs typeface="Arial" pitchFamily="34" charset="-120"/>
+                <a:latin typeface="Inter" pitchFamily="34" charset="0"/>
+                <a:ea typeface="Inter" pitchFamily="34" charset="-122"/>
+                <a:cs typeface="Inter" pitchFamily="34" charset="-120"/>
               </a:rPr>
               <a:t>¿Estoy hablando con la persona correcta para crear influencia ética positiva?</a:t>
             </a:r>
@@ -3215,9 +3215,9 @@
                 <a:solidFill>
                   <a:srgbClr val="08407C"/>
                 </a:solidFill>
-                <a:latin typeface="Arial" pitchFamily="34" charset="0"/>
-                <a:ea typeface="Arial" pitchFamily="34" charset="-122"/>
-                <a:cs typeface="Arial" pitchFamily="34" charset="-120"/>
+                <a:latin typeface="Inter" pitchFamily="34" charset="0"/>
+                <a:ea typeface="Inter" pitchFamily="34" charset="-122"/>
+                <a:cs typeface="Inter" pitchFamily="34" charset="-120"/>
               </a:rPr>
               <a:t>Calificación de los prospectos</a:t>
             </a:r>
@@ -3254,9 +3254,9 @@
                 <a:solidFill>
                   <a:srgbClr val="6A7686"/>
                 </a:solidFill>
-                <a:latin typeface="Arial" pitchFamily="34" charset="0"/>
-                <a:ea typeface="Arial" pitchFamily="34" charset="-122"/>
-                <a:cs typeface="Arial" pitchFamily="34" charset="-120"/>
+                <a:latin typeface="Inter" pitchFamily="34" charset="0"/>
+                <a:ea typeface="Inter" pitchFamily="34" charset="-122"/>
+                <a:cs typeface="Inter" pitchFamily="34" charset="-120"/>
               </a:rPr>
               <a:t>Técnica PATI: otra forma de medir para concientizar.</a:t>
             </a:r>
@@ -3320,9 +3320,9 @@
                 <a:solidFill>
                   <a:srgbClr val="6A7686"/>
                 </a:solidFill>
-                <a:latin typeface="Arial" pitchFamily="34" charset="0"/>
-                <a:ea typeface="Arial" pitchFamily="34" charset="-122"/>
-                <a:cs typeface="Arial" pitchFamily="34" charset="-120"/>
+                <a:latin typeface="Inter" pitchFamily="34" charset="0"/>
+                <a:ea typeface="Inter" pitchFamily="34" charset="-122"/>
+                <a:cs typeface="Inter" pitchFamily="34" charset="-120"/>
               </a:rPr>
               <a:t>P</a:t>
             </a:r>
@@ -3386,9 +3386,9 @@
                 <a:solidFill>
                   <a:srgbClr val="6A7686"/>
                 </a:solidFill>
-                <a:latin typeface="Arial" pitchFamily="34" charset="0"/>
-                <a:ea typeface="Arial" pitchFamily="34" charset="-122"/>
-                <a:cs typeface="Arial" pitchFamily="34" charset="-120"/>
+                <a:latin typeface="Inter" pitchFamily="34" charset="0"/>
+                <a:ea typeface="Inter" pitchFamily="34" charset="-122"/>
+                <a:cs typeface="Inter" pitchFamily="34" charset="-120"/>
               </a:rPr>
               <a:t>A</a:t>
             </a:r>
@@ -3452,9 +3452,9 @@
                 <a:solidFill>
                   <a:srgbClr val="FFFFFF"/>
                 </a:solidFill>
-                <a:latin typeface="Arial" pitchFamily="34" charset="0"/>
-                <a:ea typeface="Arial" pitchFamily="34" charset="-122"/>
-                <a:cs typeface="Arial" pitchFamily="34" charset="-120"/>
+                <a:latin typeface="Inter" pitchFamily="34" charset="0"/>
+                <a:ea typeface="Inter" pitchFamily="34" charset="-122"/>
+                <a:cs typeface="Inter" pitchFamily="34" charset="-120"/>
               </a:rPr>
               <a:t>T</a:t>
             </a:r>
@@ -3518,9 +3518,9 @@
                 <a:solidFill>
                   <a:srgbClr val="6A7686"/>
                 </a:solidFill>
-                <a:latin typeface="Arial" pitchFamily="34" charset="0"/>
-                <a:ea typeface="Arial" pitchFamily="34" charset="-122"/>
-                <a:cs typeface="Arial" pitchFamily="34" charset="-120"/>
+                <a:latin typeface="Inter" pitchFamily="34" charset="0"/>
+                <a:ea typeface="Inter" pitchFamily="34" charset="-122"/>
+                <a:cs typeface="Inter" pitchFamily="34" charset="-120"/>
               </a:rPr>
               <a:t>I</a:t>
             </a:r>
@@ -3584,9 +3584,9 @@
                 <a:solidFill>
                   <a:srgbClr val="FFFFFF"/>
                 </a:solidFill>
-                <a:latin typeface="Arial" pitchFamily="34" charset="0"/>
-                <a:ea typeface="Arial" pitchFamily="34" charset="-122"/>
-                <a:cs typeface="Arial" pitchFamily="34" charset="-120"/>
+                <a:latin typeface="Inter" pitchFamily="34" charset="0"/>
+                <a:ea typeface="Inter" pitchFamily="34" charset="-122"/>
+                <a:cs typeface="Inter" pitchFamily="34" charset="-120"/>
               </a:rPr>
               <a:t>T</a:t>
             </a:r>
@@ -3623,9 +3623,9 @@
                 <a:solidFill>
                   <a:srgbClr val="FFFFFF"/>
                 </a:solidFill>
-                <a:latin typeface="Arial" pitchFamily="34" charset="0"/>
-                <a:ea typeface="Arial" pitchFamily="34" charset="-122"/>
-                <a:cs typeface="Arial" pitchFamily="34" charset="-120"/>
+                <a:latin typeface="Inter" pitchFamily="34" charset="0"/>
+                <a:ea typeface="Inter" pitchFamily="34" charset="-122"/>
+                <a:cs typeface="Inter" pitchFamily="34" charset="-120"/>
               </a:rPr>
               <a:t>Tiempo</a:t>
             </a:r>
@@ -3663,11 +3663,11 @@
             <a:r>
               <a:rPr lang="en-US" sz="1050" dirty="0">
                 <a:solidFill>
-                  <a:srgbClr val="DCE6F2"/>
-                </a:solidFill>
-                <a:latin typeface="Arial" pitchFamily="34" charset="0"/>
-                <a:ea typeface="Arial" pitchFamily="34" charset="-122"/>
-                <a:cs typeface="Arial" pitchFamily="34" charset="-120"/>
+                  <a:srgbClr val="CDD8E4"/>
+                </a:solidFill>
+                <a:latin typeface="Inter" pitchFamily="34" charset="0"/>
+                <a:ea typeface="Inter" pitchFamily="34" charset="-122"/>
+                <a:cs typeface="Inter" pitchFamily="34" charset="-120"/>
               </a:rPr>
               <a:t>Preguntas para calificar</a:t>
             </a:r>
@@ -3692,11 +3692,11 @@
             </a:avLst>
           </a:prstGeom>
           <a:solidFill>
-            <a:srgbClr val="F2F4F7"/>
+            <a:srgbClr val="F3F3F3"/>
           </a:solidFill>
           <a:ln w="12700">
             <a:solidFill>
-              <a:srgbClr val="F2F4F7"/>
+              <a:srgbClr val="F3F3F3"/>
             </a:solidFill>
             <a:prstDash val="solid"/>
           </a:ln>
@@ -3734,9 +3734,9 @@
                 <a:solidFill>
                   <a:srgbClr val="2E4258"/>
                 </a:solidFill>
-                <a:latin typeface="Arial" pitchFamily="34" charset="0"/>
-                <a:ea typeface="Arial" pitchFamily="34" charset="-122"/>
-                <a:cs typeface="Arial" pitchFamily="34" charset="-120"/>
+                <a:latin typeface="Inter" pitchFamily="34" charset="0"/>
+                <a:ea typeface="Inter" pitchFamily="34" charset="-122"/>
+                <a:cs typeface="Inter" pitchFamily="34" charset="-120"/>
               </a:rPr>
               <a:t>¿Cuándo quiere concretar la operación?</a:t>
             </a:r>
@@ -3776,9 +3776,9 @@
                 <a:solidFill>
                   <a:srgbClr val="2E4258"/>
                 </a:solidFill>
-                <a:latin typeface="Arial" pitchFamily="34" charset="0"/>
-                <a:ea typeface="Arial" pitchFamily="34" charset="-122"/>
-                <a:cs typeface="Arial" pitchFamily="34" charset="-120"/>
+                <a:latin typeface="Inter" pitchFamily="34" charset="0"/>
+                <a:ea typeface="Inter" pitchFamily="34" charset="-122"/>
+                <a:cs typeface="Inter" pitchFamily="34" charset="-120"/>
               </a:rPr>
               <a:t>¿Hay alguna urgencia para vender?</a:t>
             </a:r>
@@ -3803,11 +3803,11 @@
             </a:avLst>
           </a:prstGeom>
           <a:solidFill>
-            <a:srgbClr val="F2F4F7"/>
+            <a:srgbClr val="F3F3F3"/>
           </a:solidFill>
           <a:ln w="12700">
             <a:solidFill>
-              <a:srgbClr val="F2F4F7"/>
+              <a:srgbClr val="F3F3F3"/>
             </a:solidFill>
             <a:prstDash val="solid"/>
           </a:ln>
@@ -3845,9 +3845,9 @@
                 <a:solidFill>
                   <a:srgbClr val="2E4258"/>
                 </a:solidFill>
-                <a:latin typeface="Arial" pitchFamily="34" charset="0"/>
-                <a:ea typeface="Arial" pitchFamily="34" charset="-122"/>
-                <a:cs typeface="Arial" pitchFamily="34" charset="-120"/>
+                <a:latin typeface="Inter" pitchFamily="34" charset="0"/>
+                <a:ea typeface="Inter" pitchFamily="34" charset="-122"/>
+                <a:cs typeface="Inter" pitchFamily="34" charset="-120"/>
               </a:rPr>
               <a:t>¿Te gustaría que esto se resuelva antes de que termine el año?</a:t>
             </a:r>
@@ -3911,9 +3911,9 @@
                 <a:solidFill>
                   <a:srgbClr val="FFFFFF"/>
                 </a:solidFill>
-                <a:latin typeface="Arial" pitchFamily="34" charset="0"/>
-                <a:ea typeface="Arial" pitchFamily="34" charset="-122"/>
-                <a:cs typeface="Arial" pitchFamily="34" charset="-120"/>
+                <a:latin typeface="Inter" pitchFamily="34" charset="0"/>
+                <a:ea typeface="Inter" pitchFamily="34" charset="-122"/>
+                <a:cs typeface="Inter" pitchFamily="34" charset="-120"/>
               </a:rPr>
               <a:t>LA PREGUNTA DE FONDO</a:t>
             </a:r>
@@ -3953,9 +3953,9 @@
                 <a:solidFill>
                   <a:srgbClr val="FFFFFF"/>
                 </a:solidFill>
-                <a:latin typeface="Arial" pitchFamily="34" charset="0"/>
-                <a:ea typeface="Arial" pitchFamily="34" charset="-122"/>
-                <a:cs typeface="Arial" pitchFamily="34" charset="-120"/>
+                <a:latin typeface="Inter" pitchFamily="34" charset="0"/>
+                <a:ea typeface="Inter" pitchFamily="34" charset="-122"/>
+                <a:cs typeface="Inter" pitchFamily="34" charset="-120"/>
               </a:rPr>
               <a:t>La valoración del tiempo es un excelente indicador de las necesidades del cliente.</a:t>
             </a:r>
@@ -4105,9 +4105,9 @@
                 <a:solidFill>
                   <a:srgbClr val="08407C"/>
                 </a:solidFill>
-                <a:latin typeface="Arial" pitchFamily="34" charset="0"/>
-                <a:ea typeface="Arial" pitchFamily="34" charset="-122"/>
-                <a:cs typeface="Arial" pitchFamily="34" charset="-120"/>
+                <a:latin typeface="Inter" pitchFamily="34" charset="0"/>
+                <a:ea typeface="Inter" pitchFamily="34" charset="-122"/>
+                <a:cs typeface="Inter" pitchFamily="34" charset="-120"/>
               </a:rPr>
               <a:t>Calificación de los prospectos</a:t>
             </a:r>
@@ -4144,9 +4144,9 @@
                 <a:solidFill>
                   <a:srgbClr val="6A7686"/>
                 </a:solidFill>
-                <a:latin typeface="Arial" pitchFamily="34" charset="0"/>
-                <a:ea typeface="Arial" pitchFamily="34" charset="-122"/>
-                <a:cs typeface="Arial" pitchFamily="34" charset="-120"/>
+                <a:latin typeface="Inter" pitchFamily="34" charset="0"/>
+                <a:ea typeface="Inter" pitchFamily="34" charset="-122"/>
+                <a:cs typeface="Inter" pitchFamily="34" charset="-120"/>
               </a:rPr>
               <a:t>Técnica PATI: otra forma de medir para concientizar.</a:t>
             </a:r>
@@ -4210,9 +4210,9 @@
                 <a:solidFill>
                   <a:srgbClr val="6A7686"/>
                 </a:solidFill>
-                <a:latin typeface="Arial" pitchFamily="34" charset="0"/>
-                <a:ea typeface="Arial" pitchFamily="34" charset="-122"/>
-                <a:cs typeface="Arial" pitchFamily="34" charset="-120"/>
+                <a:latin typeface="Inter" pitchFamily="34" charset="0"/>
+                <a:ea typeface="Inter" pitchFamily="34" charset="-122"/>
+                <a:cs typeface="Inter" pitchFamily="34" charset="-120"/>
               </a:rPr>
               <a:t>P</a:t>
             </a:r>
@@ -4276,9 +4276,9 @@
                 <a:solidFill>
                   <a:srgbClr val="6A7686"/>
                 </a:solidFill>
-                <a:latin typeface="Arial" pitchFamily="34" charset="0"/>
-                <a:ea typeface="Arial" pitchFamily="34" charset="-122"/>
-                <a:cs typeface="Arial" pitchFamily="34" charset="-120"/>
+                <a:latin typeface="Inter" pitchFamily="34" charset="0"/>
+                <a:ea typeface="Inter" pitchFamily="34" charset="-122"/>
+                <a:cs typeface="Inter" pitchFamily="34" charset="-120"/>
               </a:rPr>
               <a:t>A</a:t>
             </a:r>
@@ -4342,9 +4342,9 @@
                 <a:solidFill>
                   <a:srgbClr val="6A7686"/>
                 </a:solidFill>
-                <a:latin typeface="Arial" pitchFamily="34" charset="0"/>
-                <a:ea typeface="Arial" pitchFamily="34" charset="-122"/>
-                <a:cs typeface="Arial" pitchFamily="34" charset="-120"/>
+                <a:latin typeface="Inter" pitchFamily="34" charset="0"/>
+                <a:ea typeface="Inter" pitchFamily="34" charset="-122"/>
+                <a:cs typeface="Inter" pitchFamily="34" charset="-120"/>
               </a:rPr>
               <a:t>T</a:t>
             </a:r>
@@ -4408,9 +4408,9 @@
                 <a:solidFill>
                   <a:srgbClr val="FFFFFF"/>
                 </a:solidFill>
-                <a:latin typeface="Arial" pitchFamily="34" charset="0"/>
-                <a:ea typeface="Arial" pitchFamily="34" charset="-122"/>
-                <a:cs typeface="Arial" pitchFamily="34" charset="-120"/>
+                <a:latin typeface="Inter" pitchFamily="34" charset="0"/>
+                <a:ea typeface="Inter" pitchFamily="34" charset="-122"/>
+                <a:cs typeface="Inter" pitchFamily="34" charset="-120"/>
               </a:rPr>
               <a:t>I</a:t>
             </a:r>
@@ -4474,9 +4474,9 @@
                 <a:solidFill>
                   <a:srgbClr val="FFFFFF"/>
                 </a:solidFill>
-                <a:latin typeface="Arial" pitchFamily="34" charset="0"/>
-                <a:ea typeface="Arial" pitchFamily="34" charset="-122"/>
-                <a:cs typeface="Arial" pitchFamily="34" charset="-120"/>
+                <a:latin typeface="Inter" pitchFamily="34" charset="0"/>
+                <a:ea typeface="Inter" pitchFamily="34" charset="-122"/>
+                <a:cs typeface="Inter" pitchFamily="34" charset="-120"/>
               </a:rPr>
               <a:t>I</a:t>
             </a:r>
@@ -4513,9 +4513,9 @@
                 <a:solidFill>
                   <a:srgbClr val="FFFFFF"/>
                 </a:solidFill>
-                <a:latin typeface="Arial" pitchFamily="34" charset="0"/>
-                <a:ea typeface="Arial" pitchFamily="34" charset="-122"/>
-                <a:cs typeface="Arial" pitchFamily="34" charset="-120"/>
+                <a:latin typeface="Inter" pitchFamily="34" charset="0"/>
+                <a:ea typeface="Inter" pitchFamily="34" charset="-122"/>
+                <a:cs typeface="Inter" pitchFamily="34" charset="-120"/>
               </a:rPr>
               <a:t>Interés</a:t>
             </a:r>
@@ -4553,11 +4553,11 @@
             <a:r>
               <a:rPr lang="en-US" sz="1050" dirty="0">
                 <a:solidFill>
-                  <a:srgbClr val="DCE6F2"/>
-                </a:solidFill>
-                <a:latin typeface="Arial" pitchFamily="34" charset="0"/>
-                <a:ea typeface="Arial" pitchFamily="34" charset="-122"/>
-                <a:cs typeface="Arial" pitchFamily="34" charset="-120"/>
+                  <a:srgbClr val="CDD8E4"/>
+                </a:solidFill>
+                <a:latin typeface="Inter" pitchFamily="34" charset="0"/>
+                <a:ea typeface="Inter" pitchFamily="34" charset="-122"/>
+                <a:cs typeface="Inter" pitchFamily="34" charset="-120"/>
               </a:rPr>
               <a:t>Preguntas para calificar</a:t>
             </a:r>
@@ -4582,11 +4582,11 @@
             </a:avLst>
           </a:prstGeom>
           <a:solidFill>
-            <a:srgbClr val="F2F4F7"/>
+            <a:srgbClr val="F3F3F3"/>
           </a:solidFill>
           <a:ln w="12700">
             <a:solidFill>
-              <a:srgbClr val="F2F4F7"/>
+              <a:srgbClr val="F3F3F3"/>
             </a:solidFill>
             <a:prstDash val="solid"/>
           </a:ln>
@@ -4624,9 +4624,9 @@
                 <a:solidFill>
                   <a:srgbClr val="2E4258"/>
                 </a:solidFill>
-                <a:latin typeface="Arial" pitchFamily="34" charset="0"/>
-                <a:ea typeface="Arial" pitchFamily="34" charset="-122"/>
-                <a:cs typeface="Arial" pitchFamily="34" charset="-120"/>
+                <a:latin typeface="Inter" pitchFamily="34" charset="0"/>
+                <a:ea typeface="Inter" pitchFamily="34" charset="-122"/>
+                <a:cs typeface="Inter" pitchFamily="34" charset="-120"/>
               </a:rPr>
               <a:t>¿Qué tan real y prioritaria es su voluntad de avanzar?</a:t>
             </a:r>
@@ -4666,9 +4666,9 @@
                 <a:solidFill>
                   <a:srgbClr val="2E4258"/>
                 </a:solidFill>
-                <a:latin typeface="Arial" pitchFamily="34" charset="0"/>
-                <a:ea typeface="Arial" pitchFamily="34" charset="-122"/>
-                <a:cs typeface="Arial" pitchFamily="34" charset="-120"/>
+                <a:latin typeface="Inter" pitchFamily="34" charset="0"/>
+                <a:ea typeface="Inter" pitchFamily="34" charset="-122"/>
+                <a:cs typeface="Inter" pitchFamily="34" charset="-120"/>
               </a:rPr>
               <a:t>¿Qué te lleva a vender ahora?</a:t>
             </a:r>
@@ -4693,11 +4693,11 @@
             </a:avLst>
           </a:prstGeom>
           <a:solidFill>
-            <a:srgbClr val="F2F4F7"/>
+            <a:srgbClr val="F3F3F3"/>
           </a:solidFill>
           <a:ln w="12700">
             <a:solidFill>
-              <a:srgbClr val="F2F4F7"/>
+              <a:srgbClr val="F3F3F3"/>
             </a:solidFill>
             <a:prstDash val="solid"/>
           </a:ln>
@@ -4735,9 +4735,9 @@
                 <a:solidFill>
                   <a:srgbClr val="2E4258"/>
                 </a:solidFill>
-                <a:latin typeface="Arial" pitchFamily="34" charset="0"/>
-                <a:ea typeface="Arial" pitchFamily="34" charset="-122"/>
-                <a:cs typeface="Arial" pitchFamily="34" charset="-120"/>
+                <a:latin typeface="Inter" pitchFamily="34" charset="0"/>
+                <a:ea typeface="Inter" pitchFamily="34" charset="-122"/>
+                <a:cs typeface="Inter" pitchFamily="34" charset="-120"/>
               </a:rPr>
               <a:t>¿Lo ves como una opción concreta o lo estás tanteando?</a:t>
             </a:r>
@@ -4801,9 +4801,9 @@
                 <a:solidFill>
                   <a:srgbClr val="FFFFFF"/>
                 </a:solidFill>
-                <a:latin typeface="Arial" pitchFamily="34" charset="0"/>
-                <a:ea typeface="Arial" pitchFamily="34" charset="-122"/>
-                <a:cs typeface="Arial" pitchFamily="34" charset="-120"/>
+                <a:latin typeface="Inter" pitchFamily="34" charset="0"/>
+                <a:ea typeface="Inter" pitchFamily="34" charset="-122"/>
+                <a:cs typeface="Inter" pitchFamily="34" charset="-120"/>
               </a:rPr>
               <a:t>LA PREGUNTA DE FONDO</a:t>
             </a:r>
@@ -4843,9 +4843,9 @@
                 <a:solidFill>
                   <a:srgbClr val="FFFFFF"/>
                 </a:solidFill>
-                <a:latin typeface="Arial" pitchFamily="34" charset="0"/>
-                <a:ea typeface="Arial" pitchFamily="34" charset="-122"/>
-                <a:cs typeface="Arial" pitchFamily="34" charset="-120"/>
+                <a:latin typeface="Inter" pitchFamily="34" charset="0"/>
+                <a:ea typeface="Inter" pitchFamily="34" charset="-122"/>
+                <a:cs typeface="Inter" pitchFamily="34" charset="-120"/>
               </a:rPr>
               <a:t>El interés declarado no alcanza: lo que confirma la intención es si ya hizo algo al respecto.</a:t>
             </a:r>
@@ -4995,9 +4995,9 @@
                 <a:solidFill>
                   <a:srgbClr val="08407C"/>
                 </a:solidFill>
-                <a:latin typeface="Arial" pitchFamily="34" charset="0"/>
-                <a:ea typeface="Arial" pitchFamily="34" charset="-122"/>
-                <a:cs typeface="Arial" pitchFamily="34" charset="-120"/>
+                <a:latin typeface="Inter" pitchFamily="34" charset="0"/>
+                <a:ea typeface="Inter" pitchFamily="34" charset="-122"/>
+                <a:cs typeface="Inter" pitchFamily="34" charset="-120"/>
               </a:rPr>
               <a:t>Dejen de negociar el precio del éxito</a:t>
             </a:r>
@@ -5034,9 +5034,9 @@
                 <a:solidFill>
                   <a:srgbClr val="6A7686"/>
                 </a:solidFill>
-                <a:latin typeface="Arial" pitchFamily="34" charset="0"/>
-                <a:ea typeface="Arial" pitchFamily="34" charset="-122"/>
-                <a:cs typeface="Arial" pitchFamily="34" charset="-120"/>
+                <a:latin typeface="Inter" pitchFamily="34" charset="0"/>
+                <a:ea typeface="Inter" pitchFamily="34" charset="-122"/>
+                <a:cs typeface="Inter" pitchFamily="34" charset="-120"/>
               </a:rPr>
               <a:t>No caigan en el engaño.</a:t>
             </a:r>
@@ -5103,9 +5103,9 @@
                 <a:solidFill>
                   <a:srgbClr val="FFFFFF"/>
                 </a:solidFill>
-                <a:latin typeface="Arial" pitchFamily="34" charset="0"/>
-                <a:ea typeface="Arial" pitchFamily="34" charset="-122"/>
-                <a:cs typeface="Arial" pitchFamily="34" charset="-120"/>
+                <a:latin typeface="Inter" pitchFamily="34" charset="0"/>
+                <a:ea typeface="Inter" pitchFamily="34" charset="-122"/>
+                <a:cs typeface="Inter" pitchFamily="34" charset="-120"/>
               </a:rPr>
               <a:t>No es uno el que no quiere hacer lo que se debe: es la comodidad del cuerpo la que nos empuja a no hacerlo. El cuerpo es material, como un cigarrillo o una torta. ¿La materia te puede dominar?</a:t>
             </a:r>
@@ -5172,9 +5172,9 @@
                 <a:solidFill>
                   <a:srgbClr val="FFFFFF"/>
                 </a:solidFill>
-                <a:latin typeface="Arial" pitchFamily="34" charset="0"/>
-                <a:ea typeface="Arial" pitchFamily="34" charset="-122"/>
-                <a:cs typeface="Arial" pitchFamily="34" charset="-120"/>
+                <a:latin typeface="Inter" pitchFamily="34" charset="0"/>
+                <a:ea typeface="Inter" pitchFamily="34" charset="-122"/>
+                <a:cs typeface="Inter" pitchFamily="34" charset="-120"/>
               </a:rPr>
               <a:t>Hasta que no encuentren el combustible que convierte sus deseos en acción, no va a haber curso, capacitación, carrera, profesor, socio, pareja ni colega que les haga el puente al éxito: la realización es personal, no compartida.</a:t>
             </a:r>
@@ -5238,9 +5238,9 @@
                 <a:solidFill>
                   <a:srgbClr val="FFFFFF"/>
                 </a:solidFill>
-                <a:latin typeface="Arial" pitchFamily="34" charset="0"/>
-                <a:ea typeface="Arial" pitchFamily="34" charset="-122"/>
-                <a:cs typeface="Arial" pitchFamily="34" charset="-120"/>
+                <a:latin typeface="Inter" pitchFamily="34" charset="0"/>
+                <a:ea typeface="Inter" pitchFamily="34" charset="-122"/>
+                <a:cs typeface="Inter" pitchFamily="34" charset="-120"/>
               </a:rPr>
               <a:t>EL CIERRE</a:t>
             </a:r>
@@ -5280,9 +5280,9 @@
                 <a:solidFill>
                   <a:srgbClr val="FFFFFF"/>
                 </a:solidFill>
-                <a:latin typeface="Arial" pitchFamily="34" charset="0"/>
-                <a:ea typeface="Arial" pitchFamily="34" charset="-122"/>
-                <a:cs typeface="Arial" pitchFamily="34" charset="-120"/>
+                <a:latin typeface="Inter" pitchFamily="34" charset="0"/>
+                <a:ea typeface="Inter" pitchFamily="34" charset="-122"/>
+                <a:cs typeface="Inter" pitchFamily="34" charset="-120"/>
               </a:rPr>
               <a:t>El camino del éxito comienza en la soledad.</a:t>
             </a:r>
@@ -5382,9 +5382,9 @@
                 <a:solidFill>
                   <a:srgbClr val="08407C"/>
                 </a:solidFill>
-                <a:latin typeface="Arial" pitchFamily="34" charset="0"/>
-                <a:ea typeface="Arial" pitchFamily="34" charset="-122"/>
-                <a:cs typeface="Arial" pitchFamily="34" charset="-120"/>
+                <a:latin typeface="Inter" pitchFamily="34" charset="0"/>
+                <a:ea typeface="Inter" pitchFamily="34" charset="-122"/>
+                <a:cs typeface="Inter" pitchFamily="34" charset="-120"/>
               </a:rPr>
               <a:t>Muchas gracias.</a:t>
             </a:r>
@@ -5421,9 +5421,9 @@
                 <a:solidFill>
                   <a:srgbClr val="4E586E"/>
                 </a:solidFill>
-                <a:latin typeface="Arial" pitchFamily="34" charset="0"/>
-                <a:ea typeface="Arial" pitchFamily="34" charset="-122"/>
-                <a:cs typeface="Arial" pitchFamily="34" charset="-120"/>
+                <a:latin typeface="Inter" pitchFamily="34" charset="0"/>
+                <a:ea typeface="Inter" pitchFamily="34" charset="-122"/>
+                <a:cs typeface="Inter" pitchFamily="34" charset="-120"/>
               </a:rPr>
               <a:t>Sin prospectos no hay oportunidades, y sin oportunidades no hay cierres.</a:t>
             </a:r>
@@ -5460,9 +5460,9 @@
                 <a:solidFill>
                   <a:srgbClr val="6A7686"/>
                 </a:solidFill>
-                <a:latin typeface="Arial" pitchFamily="34" charset="0"/>
-                <a:ea typeface="Arial" pitchFamily="34" charset="-122"/>
-                <a:cs typeface="Arial" pitchFamily="34" charset="-120"/>
+                <a:latin typeface="Inter" pitchFamily="34" charset="0"/>
+                <a:ea typeface="Inter" pitchFamily="34" charset="-122"/>
+                <a:cs typeface="Inter" pitchFamily="34" charset="-120"/>
               </a:rPr>
               <a:t>Capacitaciones Krak Real Estate · Técnicas Avanzadas de Prospección Inmobiliaria</a:t>
             </a:r>
@@ -5612,9 +5612,9 @@
                 <a:solidFill>
                   <a:srgbClr val="08407C"/>
                 </a:solidFill>
-                <a:latin typeface="Arial" pitchFamily="34" charset="0"/>
-                <a:ea typeface="Arial" pitchFamily="34" charset="-122"/>
-                <a:cs typeface="Arial" pitchFamily="34" charset="-120"/>
+                <a:latin typeface="Inter" pitchFamily="34" charset="0"/>
+                <a:ea typeface="Inter" pitchFamily="34" charset="-122"/>
+                <a:cs typeface="Inter" pitchFamily="34" charset="-120"/>
               </a:rPr>
               <a:t>¿Qué es la prospección?</a:t>
             </a:r>
@@ -5651,9 +5651,9 @@
                 <a:solidFill>
                   <a:srgbClr val="6A7686"/>
                 </a:solidFill>
-                <a:latin typeface="Arial" pitchFamily="34" charset="0"/>
-                <a:ea typeface="Arial" pitchFamily="34" charset="-122"/>
-                <a:cs typeface="Arial" pitchFamily="34" charset="-120"/>
+                <a:latin typeface="Inter" pitchFamily="34" charset="0"/>
+                <a:ea typeface="Inter" pitchFamily="34" charset="-122"/>
+                <a:cs typeface="Inter" pitchFamily="34" charset="-120"/>
               </a:rPr>
               <a:t>El primer eslabón de toda la cadena comercial.</a:t>
             </a:r>
@@ -5717,9 +5717,9 @@
                 <a:solidFill>
                   <a:srgbClr val="FFFFFF"/>
                 </a:solidFill>
-                <a:latin typeface="Arial" pitchFamily="34" charset="0"/>
-                <a:ea typeface="Arial" pitchFamily="34" charset="-122"/>
-                <a:cs typeface="Arial" pitchFamily="34" charset="-120"/>
+                <a:latin typeface="Inter" pitchFamily="34" charset="0"/>
+                <a:ea typeface="Inter" pitchFamily="34" charset="-122"/>
+                <a:cs typeface="Inter" pitchFamily="34" charset="-120"/>
               </a:rPr>
               <a:t>Definición</a:t>
             </a:r>
@@ -5757,11 +5757,11 @@
             <a:r>
               <a:rPr lang="en-US" sz="1200" dirty="0">
                 <a:solidFill>
-                  <a:srgbClr val="DCE6F2"/>
-                </a:solidFill>
-                <a:latin typeface="Arial" pitchFamily="34" charset="0"/>
-                <a:ea typeface="Arial" pitchFamily="34" charset="-122"/>
-                <a:cs typeface="Arial" pitchFamily="34" charset="-120"/>
+                  <a:srgbClr val="CDD8E4"/>
+                </a:solidFill>
+                <a:latin typeface="Inter" pitchFamily="34" charset="0"/>
+                <a:ea typeface="Inter" pitchFamily="34" charset="-122"/>
+                <a:cs typeface="Inter" pitchFamily="34" charset="-120"/>
               </a:rPr>
               <a:t>Es el proceso sistemático de identificar personas que pueden convertirse en potenciales clientes. En el ámbito inmobiliario, detectar propietarios interesados en vender, alquilar o invertir.</a:t>
             </a:r>
@@ -5825,9 +5825,9 @@
                 <a:solidFill>
                   <a:srgbClr val="FFFFFF"/>
                 </a:solidFill>
-                <a:latin typeface="Arial" pitchFamily="34" charset="0"/>
-                <a:ea typeface="Arial" pitchFamily="34" charset="-122"/>
-                <a:cs typeface="Arial" pitchFamily="34" charset="-120"/>
+                <a:latin typeface="Inter" pitchFamily="34" charset="0"/>
+                <a:ea typeface="Inter" pitchFamily="34" charset="-122"/>
+                <a:cs typeface="Inter" pitchFamily="34" charset="-120"/>
               </a:rPr>
               <a:t>Por qué es estratégica</a:t>
             </a:r>
@@ -5865,11 +5865,11 @@
             <a:r>
               <a:rPr lang="en-US" sz="1200" dirty="0">
                 <a:solidFill>
-                  <a:srgbClr val="F0F2F5"/>
-                </a:solidFill>
-                <a:latin typeface="Arial" pitchFamily="34" charset="0"/>
-                <a:ea typeface="Arial" pitchFamily="34" charset="-122"/>
-                <a:cs typeface="Arial" pitchFamily="34" charset="-120"/>
+                  <a:srgbClr val="E4E6E9"/>
+                </a:solidFill>
+                <a:latin typeface="Inter" pitchFamily="34" charset="0"/>
+                <a:ea typeface="Inter" pitchFamily="34" charset="-122"/>
+                <a:cs typeface="Inter" pitchFamily="34" charset="-120"/>
               </a:rPr>
               <a:t>La prospección es el primer eslabón.</a:t>
             </a:r>
@@ -5894,11 +5894,11 @@
             <a:r>
               <a:rPr lang="en-US" sz="1200" dirty="0">
                 <a:solidFill>
-                  <a:srgbClr val="F0F2F5"/>
-                </a:solidFill>
-                <a:latin typeface="Arial" pitchFamily="34" charset="0"/>
-                <a:ea typeface="Arial" pitchFamily="34" charset="-122"/>
-                <a:cs typeface="Arial" pitchFamily="34" charset="-120"/>
+                  <a:srgbClr val="E4E6E9"/>
+                </a:solidFill>
+                <a:latin typeface="Inter" pitchFamily="34" charset="0"/>
+                <a:ea typeface="Inter" pitchFamily="34" charset="-122"/>
+                <a:cs typeface="Inter" pitchFamily="34" charset="-120"/>
               </a:rPr>
               <a:t>Sin prospectos no hay oportunidades, y sin oportunidades no hay cierres.</a:t>
             </a:r>
@@ -5962,9 +5962,9 @@
                 <a:solidFill>
                   <a:srgbClr val="FFFFFF"/>
                 </a:solidFill>
-                <a:latin typeface="Arial" pitchFamily="34" charset="0"/>
-                <a:ea typeface="Arial" pitchFamily="34" charset="-122"/>
-                <a:cs typeface="Arial" pitchFamily="34" charset="-120"/>
+                <a:latin typeface="Inter" pitchFamily="34" charset="0"/>
+                <a:ea typeface="Inter" pitchFamily="34" charset="-122"/>
+                <a:cs typeface="Inter" pitchFamily="34" charset="-120"/>
               </a:rPr>
               <a:t>LA ACTITUD DE FONDO</a:t>
             </a:r>
@@ -6004,9 +6004,9 @@
                 <a:solidFill>
                   <a:srgbClr val="FFFFFF"/>
                 </a:solidFill>
-                <a:latin typeface="Arial" pitchFamily="34" charset="0"/>
-                <a:ea typeface="Arial" pitchFamily="34" charset="-122"/>
-                <a:cs typeface="Arial" pitchFamily="34" charset="-120"/>
+                <a:latin typeface="Inter" pitchFamily="34" charset="0"/>
+                <a:ea typeface="Inter" pitchFamily="34" charset="-122"/>
+                <a:cs typeface="Inter" pitchFamily="34" charset="-120"/>
               </a:rPr>
               <a:t>Nunca se sabe dónde salta la coneja: hay que estar siempre atento a la oportunidad.</a:t>
             </a:r>
@@ -6156,9 +6156,9 @@
                 <a:solidFill>
                   <a:srgbClr val="08407C"/>
                 </a:solidFill>
-                <a:latin typeface="Arial" pitchFamily="34" charset="0"/>
-                <a:ea typeface="Arial" pitchFamily="34" charset="-122"/>
-                <a:cs typeface="Arial" pitchFamily="34" charset="-120"/>
+                <a:latin typeface="Inter" pitchFamily="34" charset="0"/>
+                <a:ea typeface="Inter" pitchFamily="34" charset="-122"/>
+                <a:cs typeface="Inter" pitchFamily="34" charset="-120"/>
               </a:rPr>
               <a:t>¿Qué tipo de negocio son los bienes raíces?</a:t>
             </a:r>
@@ -6195,9 +6195,9 @@
                 <a:solidFill>
                   <a:srgbClr val="6A7686"/>
                 </a:solidFill>
-                <a:latin typeface="Arial" pitchFamily="34" charset="0"/>
-                <a:ea typeface="Arial" pitchFamily="34" charset="-122"/>
-                <a:cs typeface="Arial" pitchFamily="34" charset="-120"/>
+                <a:latin typeface="Inter" pitchFamily="34" charset="0"/>
+                <a:ea typeface="Inter" pitchFamily="34" charset="-122"/>
+                <a:cs typeface="Inter" pitchFamily="34" charset="-120"/>
               </a:rPr>
               <a:t>Una respuesta corta y una consecuencia larga.</a:t>
             </a:r>
@@ -6261,9 +6261,9 @@
                 <a:solidFill>
                   <a:srgbClr val="FFFFFF"/>
                 </a:solidFill>
-                <a:latin typeface="Arial" pitchFamily="34" charset="0"/>
-                <a:ea typeface="Arial" pitchFamily="34" charset="-122"/>
-                <a:cs typeface="Arial" pitchFamily="34" charset="-120"/>
+                <a:latin typeface="Inter" pitchFamily="34" charset="0"/>
+                <a:ea typeface="Inter" pitchFamily="34" charset="-122"/>
+                <a:cs typeface="Inter" pitchFamily="34" charset="-120"/>
               </a:rPr>
               <a:t>El negocio es hacer amigos.</a:t>
             </a:r>
@@ -6303,9 +6303,9 @@
                 <a:solidFill>
                   <a:srgbClr val="2E4258"/>
                 </a:solidFill>
-                <a:latin typeface="Arial" pitchFamily="34" charset="0"/>
-                <a:ea typeface="Arial" pitchFamily="34" charset="-122"/>
-                <a:cs typeface="Arial" pitchFamily="34" charset="-120"/>
+                <a:latin typeface="Inter" pitchFamily="34" charset="0"/>
+                <a:ea typeface="Inter" pitchFamily="34" charset="-122"/>
+                <a:cs typeface="Inter" pitchFamily="34" charset="-120"/>
               </a:rPr>
               <a:t>Ahora bien, ¿todos los amigos son iguales? ¿Con todos vamos a comer una vez por semana? ¿Vamos a jugar a la pelota con todos?</a:t>
             </a:r>
@@ -6330,11 +6330,11 @@
             </a:avLst>
           </a:prstGeom>
           <a:solidFill>
-            <a:srgbClr val="F2F4F7"/>
+            <a:srgbClr val="F3F3F3"/>
           </a:solidFill>
           <a:ln w="12700">
             <a:solidFill>
-              <a:srgbClr val="F2F4F7"/>
+              <a:srgbClr val="F3F3F3"/>
             </a:solidFill>
             <a:prstDash val="solid"/>
           </a:ln>
@@ -6372,9 +6372,9 @@
                 <a:solidFill>
                   <a:srgbClr val="08407C"/>
                 </a:solidFill>
-                <a:latin typeface="Arial" pitchFamily="34" charset="0"/>
-                <a:ea typeface="Arial" pitchFamily="34" charset="-122"/>
-                <a:cs typeface="Arial" pitchFamily="34" charset="-120"/>
+                <a:latin typeface="Inter" pitchFamily="34" charset="0"/>
+                <a:ea typeface="Inter" pitchFamily="34" charset="-122"/>
+                <a:cs typeface="Inter" pitchFamily="34" charset="-120"/>
               </a:rPr>
               <a:t>Hay que redefinir el concepto de “amigo” cuando estamos trabajando.</a:t>
             </a:r>
@@ -6438,9 +6438,9 @@
                 <a:solidFill>
                   <a:srgbClr val="FFFFFF"/>
                 </a:solidFill>
-                <a:latin typeface="Arial" pitchFamily="34" charset="0"/>
-                <a:ea typeface="Arial" pitchFamily="34" charset="-122"/>
-                <a:cs typeface="Arial" pitchFamily="34" charset="-120"/>
+                <a:latin typeface="Inter" pitchFamily="34" charset="0"/>
+                <a:ea typeface="Inter" pitchFamily="34" charset="-122"/>
+                <a:cs typeface="Inter" pitchFamily="34" charset="-120"/>
               </a:rPr>
               <a:t>Y, sobre todo, hay que sistematizarlo.</a:t>
             </a:r>
@@ -6489,11 +6489,11 @@
             </a:avLst>
           </a:prstGeom>
           <a:solidFill>
-            <a:srgbClr val="F2F4F7"/>
+            <a:srgbClr val="F3F3F3"/>
           </a:solidFill>
           <a:ln w="12700">
             <a:solidFill>
-              <a:srgbClr val="F2F4F7"/>
+              <a:srgbClr val="F3F3F3"/>
             </a:solidFill>
             <a:prstDash val="solid"/>
           </a:ln>
@@ -6531,9 +6531,9 @@
                 <a:solidFill>
                   <a:srgbClr val="2E4258"/>
                 </a:solidFill>
-                <a:latin typeface="Arial" pitchFamily="34" charset="0"/>
-                <a:ea typeface="Arial" pitchFamily="34" charset="-122"/>
-                <a:cs typeface="Arial" pitchFamily="34" charset="-120"/>
+                <a:latin typeface="Inter" pitchFamily="34" charset="0"/>
+                <a:ea typeface="Inter" pitchFamily="34" charset="-122"/>
+                <a:cs typeface="Inter" pitchFamily="34" charset="-120"/>
               </a:rPr>
               <a:t>El resto de nuestro proceso ya está sistematizado. ¿Por qué prospectar no?</a:t>
             </a:r>
@@ -6683,9 +6683,9 @@
                 <a:solidFill>
                   <a:srgbClr val="08407C"/>
                 </a:solidFill>
-                <a:latin typeface="Arial" pitchFamily="34" charset="0"/>
-                <a:ea typeface="Arial" pitchFamily="34" charset="-122"/>
-                <a:cs typeface="Arial" pitchFamily="34" charset="-120"/>
+                <a:latin typeface="Inter" pitchFamily="34" charset="0"/>
+                <a:ea typeface="Inter" pitchFamily="34" charset="-122"/>
+                <a:cs typeface="Inter" pitchFamily="34" charset="-120"/>
               </a:rPr>
               <a:t>¿Por qué medir?</a:t>
             </a:r>
@@ -6722,9 +6722,9 @@
                 <a:solidFill>
                   <a:srgbClr val="6A7686"/>
                 </a:solidFill>
-                <a:latin typeface="Arial" pitchFamily="34" charset="0"/>
-                <a:ea typeface="Arial" pitchFamily="34" charset="-122"/>
-                <a:cs typeface="Arial" pitchFamily="34" charset="-120"/>
+                <a:latin typeface="Inter" pitchFamily="34" charset="0"/>
+                <a:ea typeface="Inter" pitchFamily="34" charset="-122"/>
+                <a:cs typeface="Inter" pitchFamily="34" charset="-120"/>
               </a:rPr>
               <a:t>La respuesta cambia por completo el sentido del registro.</a:t>
             </a:r>
@@ -6788,9 +6788,9 @@
                 <a:solidFill>
                   <a:srgbClr val="FFFFFF"/>
                 </a:solidFill>
-                <a:latin typeface="Arial" pitchFamily="34" charset="0"/>
-                <a:ea typeface="Arial" pitchFamily="34" charset="-122"/>
-                <a:cs typeface="Arial" pitchFamily="34" charset="-120"/>
+                <a:latin typeface="Inter" pitchFamily="34" charset="0"/>
+                <a:ea typeface="Inter" pitchFamily="34" charset="-122"/>
+                <a:cs typeface="Inter" pitchFamily="34" charset="-120"/>
               </a:rPr>
               <a:t>¿Para CONTROLAR?</a:t>
             </a:r>
@@ -6854,9 +6854,9 @@
                 <a:solidFill>
                   <a:srgbClr val="FFFFFF"/>
                 </a:solidFill>
-                <a:latin typeface="Arial" pitchFamily="34" charset="0"/>
-                <a:ea typeface="Arial" pitchFamily="34" charset="-122"/>
-                <a:cs typeface="Arial" pitchFamily="34" charset="-120"/>
+                <a:latin typeface="Inter" pitchFamily="34" charset="0"/>
+                <a:ea typeface="Inter" pitchFamily="34" charset="-122"/>
+                <a:cs typeface="Inter" pitchFamily="34" charset="-120"/>
               </a:rPr>
               <a:t>NO</a:t>
             </a:r>
@@ -6894,11 +6894,11 @@
             <a:r>
               <a:rPr lang="en-US" sz="1300" dirty="0">
                 <a:solidFill>
-                  <a:srgbClr val="F0F2F5"/>
-                </a:solidFill>
-                <a:latin typeface="Arial" pitchFamily="34" charset="0"/>
-                <a:ea typeface="Arial" pitchFamily="34" charset="-122"/>
-                <a:cs typeface="Arial" pitchFamily="34" charset="-120"/>
+                  <a:srgbClr val="E4E6E9"/>
+                </a:solidFill>
+                <a:latin typeface="Inter" pitchFamily="34" charset="0"/>
+                <a:ea typeface="Inter" pitchFamily="34" charset="-122"/>
+                <a:cs typeface="Inter" pitchFamily="34" charset="-120"/>
               </a:rPr>
               <a:t>Los agentes son comisionistas: no sirve controlarlos, solo sirve potenciarlos.</a:t>
             </a:r>
@@ -6962,9 +6962,9 @@
                 <a:solidFill>
                   <a:srgbClr val="FFFFFF"/>
                 </a:solidFill>
-                <a:latin typeface="Arial" pitchFamily="34" charset="0"/>
-                <a:ea typeface="Arial" pitchFamily="34" charset="-122"/>
-                <a:cs typeface="Arial" pitchFamily="34" charset="-120"/>
+                <a:latin typeface="Inter" pitchFamily="34" charset="0"/>
+                <a:ea typeface="Inter" pitchFamily="34" charset="-122"/>
+                <a:cs typeface="Inter" pitchFamily="34" charset="-120"/>
               </a:rPr>
               <a:t>¿Para CONCIENTIZAR?</a:t>
             </a:r>
@@ -7028,9 +7028,9 @@
                 <a:solidFill>
                   <a:srgbClr val="FFFFFF"/>
                 </a:solidFill>
-                <a:latin typeface="Arial" pitchFamily="34" charset="0"/>
-                <a:ea typeface="Arial" pitchFamily="34" charset="-122"/>
-                <a:cs typeface="Arial" pitchFamily="34" charset="-120"/>
+                <a:latin typeface="Inter" pitchFamily="34" charset="0"/>
+                <a:ea typeface="Inter" pitchFamily="34" charset="-122"/>
+                <a:cs typeface="Inter" pitchFamily="34" charset="-120"/>
               </a:rPr>
               <a:t>SÍ</a:t>
             </a:r>
@@ -7068,11 +7068,11 @@
             <a:r>
               <a:rPr lang="en-US" sz="1300" dirty="0">
                 <a:solidFill>
-                  <a:srgbClr val="DCE6F2"/>
-                </a:solidFill>
-                <a:latin typeface="Arial" pitchFamily="34" charset="0"/>
-                <a:ea typeface="Arial" pitchFamily="34" charset="-122"/>
-                <a:cs typeface="Arial" pitchFamily="34" charset="-120"/>
+                  <a:srgbClr val="CDD8E4"/>
+                </a:solidFill>
+                <a:latin typeface="Inter" pitchFamily="34" charset="0"/>
+                <a:ea typeface="Inter" pitchFamily="34" charset="-122"/>
+                <a:cs typeface="Inter" pitchFamily="34" charset="-120"/>
               </a:rPr>
               <a:t>La conciencia es la perspectiva de nuestra realidad. A través de ella podemos orientar nuestras acciones y pensamientos para crear realidad.</a:t>
             </a:r>
@@ -7222,9 +7222,9 @@
                 <a:solidFill>
                   <a:srgbClr val="08407C"/>
                 </a:solidFill>
-                <a:latin typeface="Arial" pitchFamily="34" charset="0"/>
-                <a:ea typeface="Arial" pitchFamily="34" charset="-122"/>
-                <a:cs typeface="Arial" pitchFamily="34" charset="-120"/>
+                <a:latin typeface="Inter" pitchFamily="34" charset="0"/>
+                <a:ea typeface="Inter" pitchFamily="34" charset="-122"/>
+                <a:cs typeface="Inter" pitchFamily="34" charset="-120"/>
               </a:rPr>
               <a:t>El deseo es equivalente a la acción</a:t>
             </a:r>
@@ -7261,9 +7261,9 @@
                 <a:solidFill>
                   <a:srgbClr val="6A7686"/>
                 </a:solidFill>
-                <a:latin typeface="Arial" pitchFamily="34" charset="0"/>
-                <a:ea typeface="Arial" pitchFamily="34" charset="-122"/>
-                <a:cs typeface="Arial" pitchFamily="34" charset="-120"/>
+                <a:latin typeface="Inter" pitchFamily="34" charset="0"/>
+                <a:ea typeface="Inter" pitchFamily="34" charset="-122"/>
+                <a:cs typeface="Inter" pitchFamily="34" charset="-120"/>
               </a:rPr>
               <a:t>El mundo está lleno de buenas intenciones.</a:t>
             </a:r>
@@ -7288,11 +7288,11 @@
             </a:avLst>
           </a:prstGeom>
           <a:solidFill>
-            <a:srgbClr val="F2F4F7"/>
+            <a:srgbClr val="F3F3F3"/>
           </a:solidFill>
           <a:ln w="12700">
             <a:solidFill>
-              <a:srgbClr val="F2F4F7"/>
+              <a:srgbClr val="F3F3F3"/>
             </a:solidFill>
             <a:prstDash val="solid"/>
           </a:ln>
@@ -7330,9 +7330,9 @@
                 <a:solidFill>
                   <a:srgbClr val="2E4258"/>
                 </a:solidFill>
-                <a:latin typeface="Arial" pitchFamily="34" charset="0"/>
-                <a:ea typeface="Arial" pitchFamily="34" charset="-122"/>
-                <a:cs typeface="Arial" pitchFamily="34" charset="-120"/>
+                <a:latin typeface="Inter" pitchFamily="34" charset="0"/>
+                <a:ea typeface="Inter" pitchFamily="34" charset="-122"/>
+                <a:cs typeface="Inter" pitchFamily="34" charset="-120"/>
               </a:rPr>
               <a:t>“Este año me recibo”</a:t>
             </a:r>
@@ -7357,11 +7357,11 @@
             </a:avLst>
           </a:prstGeom>
           <a:solidFill>
-            <a:srgbClr val="F2F4F7"/>
+            <a:srgbClr val="F3F3F3"/>
           </a:solidFill>
           <a:ln w="12700">
             <a:solidFill>
-              <a:srgbClr val="F2F4F7"/>
+              <a:srgbClr val="F3F3F3"/>
             </a:solidFill>
             <a:prstDash val="solid"/>
           </a:ln>
@@ -7399,9 +7399,9 @@
                 <a:solidFill>
                   <a:srgbClr val="2E4258"/>
                 </a:solidFill>
-                <a:latin typeface="Arial" pitchFamily="34" charset="0"/>
-                <a:ea typeface="Arial" pitchFamily="34" charset="-122"/>
-                <a:cs typeface="Arial" pitchFamily="34" charset="-120"/>
+                <a:latin typeface="Inter" pitchFamily="34" charset="0"/>
+                <a:ea typeface="Inter" pitchFamily="34" charset="-122"/>
+                <a:cs typeface="Inter" pitchFamily="34" charset="-120"/>
               </a:rPr>
               <a:t>“Quiero estar en forma”</a:t>
             </a:r>
@@ -7426,11 +7426,11 @@
             </a:avLst>
           </a:prstGeom>
           <a:solidFill>
-            <a:srgbClr val="F2F4F7"/>
+            <a:srgbClr val="F3F3F3"/>
           </a:solidFill>
           <a:ln w="12700">
             <a:solidFill>
-              <a:srgbClr val="F2F4F7"/>
+              <a:srgbClr val="F3F3F3"/>
             </a:solidFill>
             <a:prstDash val="solid"/>
           </a:ln>
@@ -7468,9 +7468,9 @@
                 <a:solidFill>
                   <a:srgbClr val="2E4258"/>
                 </a:solidFill>
-                <a:latin typeface="Arial" pitchFamily="34" charset="0"/>
-                <a:ea typeface="Arial" pitchFamily="34" charset="-122"/>
-                <a:cs typeface="Arial" pitchFamily="34" charset="-120"/>
+                <a:latin typeface="Inter" pitchFamily="34" charset="0"/>
+                <a:ea typeface="Inter" pitchFamily="34" charset="-122"/>
+                <a:cs typeface="Inter" pitchFamily="34" charset="-120"/>
               </a:rPr>
               <a:t>“Voy a ser el mejor en X cosa”</a:t>
             </a:r>
@@ -7537,9 +7537,9 @@
                 <a:solidFill>
                   <a:srgbClr val="FFFFFF"/>
                 </a:solidFill>
-                <a:latin typeface="Arial" pitchFamily="34" charset="0"/>
-                <a:ea typeface="Arial" pitchFamily="34" charset="-122"/>
-                <a:cs typeface="Arial" pitchFamily="34" charset="-120"/>
+                <a:latin typeface="Inter" pitchFamily="34" charset="0"/>
+                <a:ea typeface="Inter" pitchFamily="34" charset="-122"/>
+                <a:cs typeface="Inter" pitchFamily="34" charset="-120"/>
               </a:rPr>
               <a:t>¿Estás entrenando lo suficiente? ¿Estás estudiando? ¿Estás comiendo como se debe? ¿Estás yendo todos los días al gimnasio?</a:t>
             </a:r>
@@ -7603,9 +7603,9 @@
                 <a:solidFill>
                   <a:srgbClr val="FFFFFF"/>
                 </a:solidFill>
-                <a:latin typeface="Arial" pitchFamily="34" charset="0"/>
-                <a:ea typeface="Arial" pitchFamily="34" charset="-122"/>
-                <a:cs typeface="Arial" pitchFamily="34" charset="-120"/>
+                <a:latin typeface="Inter" pitchFamily="34" charset="0"/>
+                <a:ea typeface="Inter" pitchFamily="34" charset="-122"/>
+                <a:cs typeface="Inter" pitchFamily="34" charset="-120"/>
               </a:rPr>
               <a:t>LA REGLA</a:t>
             </a:r>
@@ -7645,9 +7645,9 @@
                 <a:solidFill>
                   <a:srgbClr val="FFFFFF"/>
                 </a:solidFill>
-                <a:latin typeface="Arial" pitchFamily="34" charset="0"/>
-                <a:ea typeface="Arial" pitchFamily="34" charset="-122"/>
-                <a:cs typeface="Arial" pitchFamily="34" charset="-120"/>
+                <a:latin typeface="Inter" pitchFamily="34" charset="0"/>
+                <a:ea typeface="Inter" pitchFamily="34" charset="-122"/>
+                <a:cs typeface="Inter" pitchFamily="34" charset="-120"/>
               </a:rPr>
               <a:t>El deseo se mide en acciones, no en intenciones. Lo mismo vale para la prospección: no importa cuánto quieras facturar, importa a cuánta gente contactaste esta semana.</a:t>
             </a:r>
@@ -7797,9 +7797,9 @@
                 <a:solidFill>
                   <a:srgbClr val="08407C"/>
                 </a:solidFill>
-                <a:latin typeface="Arial" pitchFamily="34" charset="0"/>
-                <a:ea typeface="Arial" pitchFamily="34" charset="-122"/>
-                <a:cs typeface="Arial" pitchFamily="34" charset="-120"/>
+                <a:latin typeface="Inter" pitchFamily="34" charset="0"/>
+                <a:ea typeface="Inter" pitchFamily="34" charset="-122"/>
+                <a:cs typeface="Inter" pitchFamily="34" charset="-120"/>
               </a:rPr>
               <a:t>Canales de prospección</a:t>
             </a:r>
@@ -7836,9 +7836,9 @@
                 <a:solidFill>
                   <a:srgbClr val="6A7686"/>
                 </a:solidFill>
-                <a:latin typeface="Arial" pitchFamily="34" charset="0"/>
-                <a:ea typeface="Arial" pitchFamily="34" charset="-122"/>
-                <a:cs typeface="Arial" pitchFamily="34" charset="-120"/>
+                <a:latin typeface="Inter" pitchFamily="34" charset="0"/>
+                <a:ea typeface="Inter" pitchFamily="34" charset="-122"/>
+                <a:cs typeface="Inter" pitchFamily="34" charset="-120"/>
               </a:rPr>
               <a:t>No comprás lo que no ves en la estantería.</a:t>
             </a:r>
@@ -7902,9 +7902,9 @@
                 <a:solidFill>
                   <a:srgbClr val="FFFFFF"/>
                 </a:solidFill>
-                <a:latin typeface="Arial" pitchFamily="34" charset="0"/>
-                <a:ea typeface="Arial" pitchFamily="34" charset="-122"/>
-                <a:cs typeface="Arial" pitchFamily="34" charset="-120"/>
+                <a:latin typeface="Inter" pitchFamily="34" charset="0"/>
+                <a:ea typeface="Inter" pitchFamily="34" charset="-122"/>
+                <a:cs typeface="Inter" pitchFamily="34" charset="-120"/>
               </a:rPr>
               <a:t>CANALES DIGITALES</a:t>
             </a:r>
@@ -7969,11 +7969,11 @@
             <a:r>
               <a:rPr lang="en-US" sz="1200" dirty="0">
                 <a:solidFill>
-                  <a:srgbClr val="DCE6F2"/>
-                </a:solidFill>
-                <a:latin typeface="Arial" pitchFamily="34" charset="0"/>
-                <a:ea typeface="Arial" pitchFamily="34" charset="-122"/>
-                <a:cs typeface="Arial" pitchFamily="34" charset="-120"/>
+                  <a:srgbClr val="CDD8E4"/>
+                </a:solidFill>
+                <a:latin typeface="Inter" pitchFamily="34" charset="0"/>
+                <a:ea typeface="Inter" pitchFamily="34" charset="-122"/>
+                <a:cs typeface="Inter" pitchFamily="34" charset="-120"/>
               </a:rPr>
               <a:t>Publicaciones en Zonaprop y MercadoLibre</a:t>
             </a:r>
@@ -8038,11 +8038,11 @@
             <a:r>
               <a:rPr lang="en-US" sz="1200" dirty="0">
                 <a:solidFill>
-                  <a:srgbClr val="DCE6F2"/>
-                </a:solidFill>
-                <a:latin typeface="Arial" pitchFamily="34" charset="0"/>
-                <a:ea typeface="Arial" pitchFamily="34" charset="-122"/>
-                <a:cs typeface="Arial" pitchFamily="34" charset="-120"/>
+                  <a:srgbClr val="CDD8E4"/>
+                </a:solidFill>
+                <a:latin typeface="Inter" pitchFamily="34" charset="0"/>
+                <a:ea typeface="Inter" pitchFamily="34" charset="-122"/>
+                <a:cs typeface="Inter" pitchFamily="34" charset="-120"/>
               </a:rPr>
               <a:t>Redes sociales: Facebook, Instagram, LinkedIn</a:t>
             </a:r>
@@ -8107,11 +8107,11 @@
             <a:r>
               <a:rPr lang="en-US" sz="1200" dirty="0">
                 <a:solidFill>
-                  <a:srgbClr val="DCE6F2"/>
-                </a:solidFill>
-                <a:latin typeface="Arial" pitchFamily="34" charset="0"/>
-                <a:ea typeface="Arial" pitchFamily="34" charset="-122"/>
-                <a:cs typeface="Arial" pitchFamily="34" charset="-120"/>
+                  <a:srgbClr val="CDD8E4"/>
+                </a:solidFill>
+                <a:latin typeface="Inter" pitchFamily="34" charset="0"/>
+                <a:ea typeface="Inter" pitchFamily="34" charset="-122"/>
+                <a:cs typeface="Inter" pitchFamily="34" charset="-120"/>
               </a:rPr>
               <a:t>WhatsApp Business y grupos especializados</a:t>
             </a:r>
@@ -8175,9 +8175,9 @@
                 <a:solidFill>
                   <a:srgbClr val="FFFFFF"/>
                 </a:solidFill>
-                <a:latin typeface="Arial" pitchFamily="34" charset="0"/>
-                <a:ea typeface="Arial" pitchFamily="34" charset="-122"/>
-                <a:cs typeface="Arial" pitchFamily="34" charset="-120"/>
+                <a:latin typeface="Inter" pitchFamily="34" charset="0"/>
+                <a:ea typeface="Inter" pitchFamily="34" charset="-122"/>
+                <a:cs typeface="Inter" pitchFamily="34" charset="-120"/>
               </a:rPr>
               <a:t>CANALES TRADICIONALES</a:t>
             </a:r>
@@ -8242,11 +8242,11 @@
             <a:r>
               <a:rPr lang="en-US" sz="1200" dirty="0">
                 <a:solidFill>
-                  <a:srgbClr val="F0F2F5"/>
-                </a:solidFill>
-                <a:latin typeface="Arial" pitchFamily="34" charset="0"/>
-                <a:ea typeface="Arial" pitchFamily="34" charset="-122"/>
-                <a:cs typeface="Arial" pitchFamily="34" charset="-120"/>
+                  <a:srgbClr val="E4E6E9"/>
+                </a:solidFill>
+                <a:latin typeface="Inter" pitchFamily="34" charset="0"/>
+                <a:ea typeface="Inter" pitchFamily="34" charset="-122"/>
+                <a:cs typeface="Inter" pitchFamily="34" charset="-120"/>
               </a:rPr>
               <a:t>Carteles</a:t>
             </a:r>
@@ -8311,11 +8311,11 @@
             <a:r>
               <a:rPr lang="en-US" sz="1200" dirty="0">
                 <a:solidFill>
-                  <a:srgbClr val="F0F2F5"/>
-                </a:solidFill>
-                <a:latin typeface="Arial" pitchFamily="34" charset="0"/>
-                <a:ea typeface="Arial" pitchFamily="34" charset="-122"/>
-                <a:cs typeface="Arial" pitchFamily="34" charset="-120"/>
+                  <a:srgbClr val="E4E6E9"/>
+                </a:solidFill>
+                <a:latin typeface="Inter" pitchFamily="34" charset="0"/>
+                <a:ea typeface="Inter" pitchFamily="34" charset="-122"/>
+                <a:cs typeface="Inter" pitchFamily="34" charset="-120"/>
               </a:rPr>
               <a:t>Recomendaciones</a:t>
             </a:r>
@@ -8380,11 +8380,11 @@
             <a:r>
               <a:rPr lang="en-US" sz="1200" dirty="0">
                 <a:solidFill>
-                  <a:srgbClr val="F0F2F5"/>
-                </a:solidFill>
-                <a:latin typeface="Arial" pitchFamily="34" charset="0"/>
-                <a:ea typeface="Arial" pitchFamily="34" charset="-122"/>
-                <a:cs typeface="Arial" pitchFamily="34" charset="-120"/>
+                  <a:srgbClr val="E4E6E9"/>
+                </a:solidFill>
+                <a:latin typeface="Inter" pitchFamily="34" charset="0"/>
+                <a:ea typeface="Inter" pitchFamily="34" charset="-122"/>
+                <a:cs typeface="Inter" pitchFamily="34" charset="-120"/>
               </a:rPr>
               <a:t>Recorridas por zonas activas</a:t>
             </a:r>
@@ -8449,11 +8449,11 @@
             <a:r>
               <a:rPr lang="en-US" sz="1200" dirty="0">
                 <a:solidFill>
-                  <a:srgbClr val="F0F2F5"/>
-                </a:solidFill>
-                <a:latin typeface="Arial" pitchFamily="34" charset="0"/>
-                <a:ea typeface="Arial" pitchFamily="34" charset="-122"/>
-                <a:cs typeface="Arial" pitchFamily="34" charset="-120"/>
+                  <a:srgbClr val="E4E6E9"/>
+                </a:solidFill>
+                <a:latin typeface="Inter" pitchFamily="34" charset="0"/>
+                <a:ea typeface="Inter" pitchFamily="34" charset="-122"/>
+                <a:cs typeface="Inter" pitchFamily="34" charset="-120"/>
               </a:rPr>
               <a:t>Visitas a vecinos o consorcios</a:t>
             </a:r>
@@ -8517,9 +8517,9 @@
                 <a:solidFill>
                   <a:srgbClr val="FFFFFF"/>
                 </a:solidFill>
-                <a:latin typeface="Arial" pitchFamily="34" charset="0"/>
-                <a:ea typeface="Arial" pitchFamily="34" charset="-122"/>
-                <a:cs typeface="Arial" pitchFamily="34" charset="-120"/>
+                <a:latin typeface="Inter" pitchFamily="34" charset="0"/>
+                <a:ea typeface="Inter" pitchFamily="34" charset="-122"/>
+                <a:cs typeface="Inter" pitchFamily="34" charset="-120"/>
               </a:rPr>
               <a:t>EL CRITERIO</a:t>
             </a:r>
@@ -8559,9 +8559,9 @@
                 <a:solidFill>
                   <a:srgbClr val="FFFFFF"/>
                 </a:solidFill>
-                <a:latin typeface="Arial" pitchFamily="34" charset="0"/>
-                <a:ea typeface="Arial" pitchFamily="34" charset="-122"/>
-                <a:cs typeface="Arial" pitchFamily="34" charset="-120"/>
+                <a:latin typeface="Inter" pitchFamily="34" charset="0"/>
+                <a:ea typeface="Inter" pitchFamily="34" charset="-122"/>
+                <a:cs typeface="Inter" pitchFamily="34" charset="-120"/>
               </a:rPr>
               <a:t>Si no estás en la estantería, no te eligen. Estar presente en un canal es la condición mínima para que alguien pueda pensar en vos.</a:t>
             </a:r>
@@ -8711,9 +8711,9 @@
                 <a:solidFill>
                   <a:srgbClr val="08407C"/>
                 </a:solidFill>
-                <a:latin typeface="Arial" pitchFamily="34" charset="0"/>
-                <a:ea typeface="Arial" pitchFamily="34" charset="-122"/>
-                <a:cs typeface="Arial" pitchFamily="34" charset="-120"/>
+                <a:latin typeface="Inter" pitchFamily="34" charset="0"/>
+                <a:ea typeface="Inter" pitchFamily="34" charset="-122"/>
+                <a:cs typeface="Inter" pitchFamily="34" charset="-120"/>
               </a:rPr>
               <a:t>Más canales</a:t>
             </a:r>
@@ -8750,9 +8750,9 @@
                 <a:solidFill>
                   <a:srgbClr val="6A7686"/>
                 </a:solidFill>
-                <a:latin typeface="Arial" pitchFamily="34" charset="0"/>
-                <a:ea typeface="Arial" pitchFamily="34" charset="-122"/>
-                <a:cs typeface="Arial" pitchFamily="34" charset="-120"/>
+                <a:latin typeface="Inter" pitchFamily="34" charset="0"/>
+                <a:ea typeface="Inter" pitchFamily="34" charset="-122"/>
+                <a:cs typeface="Inter" pitchFamily="34" charset="-120"/>
               </a:rPr>
               <a:t>Dos que rinden mucho y se usan poco.</a:t>
             </a:r>
@@ -8816,9 +8816,9 @@
                 <a:solidFill>
                   <a:srgbClr val="FFFFFF"/>
                 </a:solidFill>
-                <a:latin typeface="Arial" pitchFamily="34" charset="0"/>
-                <a:ea typeface="Arial" pitchFamily="34" charset="-122"/>
-                <a:cs typeface="Arial" pitchFamily="34" charset="-120"/>
+                <a:latin typeface="Inter" pitchFamily="34" charset="0"/>
+                <a:ea typeface="Inter" pitchFamily="34" charset="-122"/>
+                <a:cs typeface="Inter" pitchFamily="34" charset="-120"/>
               </a:rPr>
               <a:t>Networking estratégico</a:t>
             </a:r>
@@ -8853,11 +8853,11 @@
             <a:r>
               <a:rPr lang="en-US" sz="1150" dirty="0">
                 <a:solidFill>
-                  <a:srgbClr val="DCE6F2"/>
-                </a:solidFill>
-                <a:latin typeface="Arial" pitchFamily="34" charset="0"/>
-                <a:ea typeface="Arial" pitchFamily="34" charset="-122"/>
-                <a:cs typeface="Arial" pitchFamily="34" charset="-120"/>
+                  <a:srgbClr val="CDD8E4"/>
+                </a:solidFill>
+                <a:latin typeface="Inter" pitchFamily="34" charset="0"/>
+                <a:ea typeface="Inter" pitchFamily="34" charset="-122"/>
+                <a:cs typeface="Inter" pitchFamily="34" charset="-120"/>
               </a:rPr>
               <a:t>Pedir referidos de manera profesional.</a:t>
             </a:r>
@@ -8882,11 +8882,11 @@
             </a:avLst>
           </a:prstGeom>
           <a:solidFill>
-            <a:srgbClr val="0A5296"/>
+            <a:srgbClr val="396696"/>
           </a:solidFill>
           <a:ln w="12700">
             <a:solidFill>
-              <a:srgbClr val="0A5296"/>
+              <a:srgbClr val="396696"/>
             </a:solidFill>
             <a:prstDash val="solid"/>
           </a:ln>
@@ -8924,9 +8924,9 @@
                 <a:solidFill>
                   <a:srgbClr val="FFFFFF"/>
                 </a:solidFill>
-                <a:latin typeface="Arial" pitchFamily="34" charset="0"/>
-                <a:ea typeface="Arial" pitchFamily="34" charset="-122"/>
-                <a:cs typeface="Arial" pitchFamily="34" charset="-120"/>
+                <a:latin typeface="Inter" pitchFamily="34" charset="0"/>
+                <a:ea typeface="Inter" pitchFamily="34" charset="-122"/>
+                <a:cs typeface="Inter" pitchFamily="34" charset="-120"/>
               </a:rPr>
               <a:t>“Si conocés a alguien que está pensando en vender, ¿me conectarías con él?”</a:t>
             </a:r>
@@ -8990,9 +8990,9 @@
                 <a:solidFill>
                   <a:srgbClr val="FFFFFF"/>
                 </a:solidFill>
-                <a:latin typeface="Arial" pitchFamily="34" charset="0"/>
-                <a:ea typeface="Arial" pitchFamily="34" charset="-122"/>
-                <a:cs typeface="Arial" pitchFamily="34" charset="-120"/>
+                <a:latin typeface="Inter" pitchFamily="34" charset="0"/>
+                <a:ea typeface="Inter" pitchFamily="34" charset="-122"/>
+                <a:cs typeface="Inter" pitchFamily="34" charset="-120"/>
               </a:rPr>
               <a:t>Base de datos (barrido)</a:t>
             </a:r>
@@ -9030,11 +9030,11 @@
             <a:r>
               <a:rPr lang="en-US" sz="1150" dirty="0">
                 <a:solidFill>
-                  <a:srgbClr val="F0F2F5"/>
-                </a:solidFill>
-                <a:latin typeface="Arial" pitchFamily="34" charset="0"/>
-                <a:ea typeface="Arial" pitchFamily="34" charset="-122"/>
-                <a:cs typeface="Arial" pitchFamily="34" charset="-120"/>
+                  <a:srgbClr val="E4E6E9"/>
+                </a:solidFill>
+                <a:latin typeface="Inter" pitchFamily="34" charset="0"/>
+                <a:ea typeface="Inter" pitchFamily="34" charset="-122"/>
+                <a:cs typeface="Inter" pitchFamily="34" charset="-120"/>
               </a:rPr>
               <a:t>Contactos que alguna vez hablaron con la empresa y no avanzaron.</a:t>
             </a:r>
@@ -9101,9 +9101,9 @@
                 <a:solidFill>
                   <a:srgbClr val="FFFFFF"/>
                 </a:solidFill>
-                <a:latin typeface="Arial" pitchFamily="34" charset="0"/>
-                <a:ea typeface="Arial" pitchFamily="34" charset="-122"/>
-                <a:cs typeface="Arial" pitchFamily="34" charset="-120"/>
+                <a:latin typeface="Inter" pitchFamily="34" charset="0"/>
+                <a:ea typeface="Inter" pitchFamily="34" charset="-122"/>
+                <a:cs typeface="Inter" pitchFamily="34" charset="-120"/>
               </a:rPr>
               <a:t>Retomarlos con inteligencia puede generar oportunidades. Es el canal más barato que existe: ya están en la planilla.</a:t>
             </a:r>
@@ -9253,9 +9253,9 @@
                 <a:solidFill>
                   <a:srgbClr val="08407C"/>
                 </a:solidFill>
-                <a:latin typeface="Arial" pitchFamily="34" charset="0"/>
-                <a:ea typeface="Arial" pitchFamily="34" charset="-122"/>
-                <a:cs typeface="Arial" pitchFamily="34" charset="-120"/>
+                <a:latin typeface="Inter" pitchFamily="34" charset="0"/>
+                <a:ea typeface="Inter" pitchFamily="34" charset="-122"/>
+                <a:cs typeface="Inter" pitchFamily="34" charset="-120"/>
               </a:rPr>
               <a:t>El límite: no es obsecuencia</a:t>
             </a:r>
@@ -9292,9 +9292,9 @@
                 <a:solidFill>
                   <a:srgbClr val="6A7686"/>
                 </a:solidFill>
-                <a:latin typeface="Arial" pitchFamily="34" charset="0"/>
-                <a:ea typeface="Arial" pitchFamily="34" charset="-122"/>
-                <a:cs typeface="Arial" pitchFamily="34" charset="-120"/>
+                <a:latin typeface="Inter" pitchFamily="34" charset="0"/>
+                <a:ea typeface="Inter" pitchFamily="34" charset="-122"/>
+                <a:cs typeface="Inter" pitchFamily="34" charset="-120"/>
               </a:rPr>
               <a:t>Dónde termina la relación profesional y empieza otra cosa.</a:t>
             </a:r>
@@ -9361,9 +9361,9 @@
                 <a:solidFill>
                   <a:srgbClr val="FFFFFF"/>
                 </a:solidFill>
-                <a:latin typeface="Arial" pitchFamily="34" charset="0"/>
-                <a:ea typeface="Arial" pitchFamily="34" charset="-122"/>
-                <a:cs typeface="Arial" pitchFamily="34" charset="-120"/>
+                <a:latin typeface="Inter" pitchFamily="34" charset="0"/>
+                <a:ea typeface="Inter" pitchFamily="34" charset="-122"/>
+                <a:cs typeface="Inter" pitchFamily="34" charset="-120"/>
               </a:rPr>
               <a:t>Esto no tiene nada que ver con la obsecuencia, y no debemos caer en ella.</a:t>
             </a:r>
@@ -9388,11 +9388,11 @@
             </a:avLst>
           </a:prstGeom>
           <a:solidFill>
-            <a:srgbClr val="F2F4F7"/>
+            <a:srgbClr val="F3F3F3"/>
           </a:solidFill>
           <a:ln w="12700">
             <a:solidFill>
-              <a:srgbClr val="F2F4F7"/>
+              <a:srgbClr val="F3F3F3"/>
             </a:solidFill>
             <a:prstDash val="solid"/>
           </a:ln>
@@ -9430,9 +9430,9 @@
                 <a:solidFill>
                   <a:srgbClr val="08407C"/>
                 </a:solidFill>
-                <a:latin typeface="Arial" pitchFamily="34" charset="0"/>
-                <a:ea typeface="Arial" pitchFamily="34" charset="-122"/>
-                <a:cs typeface="Arial" pitchFamily="34" charset="-120"/>
+                <a:latin typeface="Inter" pitchFamily="34" charset="0"/>
+                <a:ea typeface="Inter" pitchFamily="34" charset="-122"/>
+                <a:cs typeface="Inter" pitchFamily="34" charset="-120"/>
               </a:rPr>
               <a:t>Tenemos que ser profesionales de las relaciones públicas.</a:t>
             </a:r>
@@ -9606,9 +9606,9 @@
                 <a:solidFill>
                   <a:srgbClr val="08407C"/>
                 </a:solidFill>
-                <a:latin typeface="Arial" pitchFamily="34" charset="0"/>
-                <a:ea typeface="Arial" pitchFamily="34" charset="-122"/>
-                <a:cs typeface="Arial" pitchFamily="34" charset="-120"/>
+                <a:latin typeface="Inter" pitchFamily="34" charset="0"/>
+                <a:ea typeface="Inter" pitchFamily="34" charset="-122"/>
+                <a:cs typeface="Inter" pitchFamily="34" charset="-120"/>
               </a:rPr>
               <a:t>Calificación de los prospectos</a:t>
             </a:r>
@@ -9645,9 +9645,9 @@
                 <a:solidFill>
                   <a:srgbClr val="6A7686"/>
                 </a:solidFill>
-                <a:latin typeface="Arial" pitchFamily="34" charset="0"/>
-                <a:ea typeface="Arial" pitchFamily="34" charset="-122"/>
-                <a:cs typeface="Arial" pitchFamily="34" charset="-120"/>
+                <a:latin typeface="Inter" pitchFamily="34" charset="0"/>
+                <a:ea typeface="Inter" pitchFamily="34" charset="-122"/>
+                <a:cs typeface="Inter" pitchFamily="34" charset="-120"/>
               </a:rPr>
               <a:t>Técnica PATI: otra forma de medir para concientizar.</a:t>
             </a:r>
@@ -9711,9 +9711,9 @@
                 <a:solidFill>
                   <a:srgbClr val="FFFFFF"/>
                 </a:solidFill>
-                <a:latin typeface="Arial" pitchFamily="34" charset="0"/>
-                <a:ea typeface="Arial" pitchFamily="34" charset="-122"/>
-                <a:cs typeface="Arial" pitchFamily="34" charset="-120"/>
+                <a:latin typeface="Inter" pitchFamily="34" charset="0"/>
+                <a:ea typeface="Inter" pitchFamily="34" charset="-122"/>
+                <a:cs typeface="Inter" pitchFamily="34" charset="-120"/>
               </a:rPr>
               <a:t>P</a:t>
             </a:r>
@@ -9777,9 +9777,9 @@
                 <a:solidFill>
                   <a:srgbClr val="6A7686"/>
                 </a:solidFill>
-                <a:latin typeface="Arial" pitchFamily="34" charset="0"/>
-                <a:ea typeface="Arial" pitchFamily="34" charset="-122"/>
-                <a:cs typeface="Arial" pitchFamily="34" charset="-120"/>
+                <a:latin typeface="Inter" pitchFamily="34" charset="0"/>
+                <a:ea typeface="Inter" pitchFamily="34" charset="-122"/>
+                <a:cs typeface="Inter" pitchFamily="34" charset="-120"/>
               </a:rPr>
               <a:t>A</a:t>
             </a:r>
@@ -9843,9 +9843,9 @@
                 <a:solidFill>
                   <a:srgbClr val="6A7686"/>
                 </a:solidFill>
-                <a:latin typeface="Arial" pitchFamily="34" charset="0"/>
-                <a:ea typeface="Arial" pitchFamily="34" charset="-122"/>
-                <a:cs typeface="Arial" pitchFamily="34" charset="-120"/>
+                <a:latin typeface="Inter" pitchFamily="34" charset="0"/>
+                <a:ea typeface="Inter" pitchFamily="34" charset="-122"/>
+                <a:cs typeface="Inter" pitchFamily="34" charset="-120"/>
               </a:rPr>
               <a:t>T</a:t>
             </a:r>
@@ -9909,9 +9909,9 @@
                 <a:solidFill>
                   <a:srgbClr val="6A7686"/>
                 </a:solidFill>
-                <a:latin typeface="Arial" pitchFamily="34" charset="0"/>
-                <a:ea typeface="Arial" pitchFamily="34" charset="-122"/>
-                <a:cs typeface="Arial" pitchFamily="34" charset="-120"/>
+                <a:latin typeface="Inter" pitchFamily="34" charset="0"/>
+                <a:ea typeface="Inter" pitchFamily="34" charset="-122"/>
+                <a:cs typeface="Inter" pitchFamily="34" charset="-120"/>
               </a:rPr>
               <a:t>I</a:t>
             </a:r>
@@ -9975,9 +9975,9 @@
                 <a:solidFill>
                   <a:srgbClr val="FFFFFF"/>
                 </a:solidFill>
-                <a:latin typeface="Arial" pitchFamily="34" charset="0"/>
-                <a:ea typeface="Arial" pitchFamily="34" charset="-122"/>
-                <a:cs typeface="Arial" pitchFamily="34" charset="-120"/>
+                <a:latin typeface="Inter" pitchFamily="34" charset="0"/>
+                <a:ea typeface="Inter" pitchFamily="34" charset="-122"/>
+                <a:cs typeface="Inter" pitchFamily="34" charset="-120"/>
               </a:rPr>
               <a:t>P</a:t>
             </a:r>
@@ -10014,9 +10014,9 @@
                 <a:solidFill>
                   <a:srgbClr val="FFFFFF"/>
                 </a:solidFill>
-                <a:latin typeface="Arial" pitchFamily="34" charset="0"/>
-                <a:ea typeface="Arial" pitchFamily="34" charset="-122"/>
-                <a:cs typeface="Arial" pitchFamily="34" charset="-120"/>
+                <a:latin typeface="Inter" pitchFamily="34" charset="0"/>
+                <a:ea typeface="Inter" pitchFamily="34" charset="-122"/>
+                <a:cs typeface="Inter" pitchFamily="34" charset="-120"/>
               </a:rPr>
               <a:t>Presupuesto</a:t>
             </a:r>
@@ -10054,11 +10054,11 @@
             <a:r>
               <a:rPr lang="en-US" sz="1050" dirty="0">
                 <a:solidFill>
-                  <a:srgbClr val="DCE6F2"/>
-                </a:solidFill>
-                <a:latin typeface="Arial" pitchFamily="34" charset="0"/>
-                <a:ea typeface="Arial" pitchFamily="34" charset="-122"/>
-                <a:cs typeface="Arial" pitchFamily="34" charset="-120"/>
+                  <a:srgbClr val="CDD8E4"/>
+                </a:solidFill>
+                <a:latin typeface="Inter" pitchFamily="34" charset="0"/>
+                <a:ea typeface="Inter" pitchFamily="34" charset="-122"/>
+                <a:cs typeface="Inter" pitchFamily="34" charset="-120"/>
               </a:rPr>
               <a:t>Preguntas para calificar</a:t>
             </a:r>
@@ -10083,11 +10083,11 @@
             </a:avLst>
           </a:prstGeom>
           <a:solidFill>
-            <a:srgbClr val="F2F4F7"/>
+            <a:srgbClr val="F3F3F3"/>
           </a:solidFill>
           <a:ln w="12700">
             <a:solidFill>
-              <a:srgbClr val="F2F4F7"/>
+              <a:srgbClr val="F3F3F3"/>
             </a:solidFill>
             <a:prstDash val="solid"/>
           </a:ln>
@@ -10125,9 +10125,9 @@
                 <a:solidFill>
                   <a:srgbClr val="2E4258"/>
                 </a:solidFill>
-                <a:latin typeface="Arial" pitchFamily="34" charset="0"/>
-                <a:ea typeface="Arial" pitchFamily="34" charset="-122"/>
-                <a:cs typeface="Arial" pitchFamily="34" charset="-120"/>
+                <a:latin typeface="Inter" pitchFamily="34" charset="0"/>
+                <a:ea typeface="Inter" pitchFamily="34" charset="-122"/>
+                <a:cs typeface="Inter" pitchFamily="34" charset="-120"/>
               </a:rPr>
               <a:t>¿Cuál es el valor esperado o aceptable para el cliente?</a:t>
             </a:r>
@@ -10167,9 +10167,9 @@
                 <a:solidFill>
                   <a:srgbClr val="2E4258"/>
                 </a:solidFill>
-                <a:latin typeface="Arial" pitchFamily="34" charset="0"/>
-                <a:ea typeface="Arial" pitchFamily="34" charset="-122"/>
-                <a:cs typeface="Arial" pitchFamily="34" charset="-120"/>
+                <a:latin typeface="Inter" pitchFamily="34" charset="0"/>
+                <a:ea typeface="Inter" pitchFamily="34" charset="-122"/>
+                <a:cs typeface="Inter" pitchFamily="34" charset="-120"/>
               </a:rPr>
               <a:t>¿Cuál es su idea de valores?</a:t>
             </a:r>
@@ -10194,11 +10194,11 @@
             </a:avLst>
           </a:prstGeom>
           <a:solidFill>
-            <a:srgbClr val="F2F4F7"/>
+            <a:srgbClr val="F3F3F3"/>
           </a:solidFill>
           <a:ln w="12700">
             <a:solidFill>
-              <a:srgbClr val="F2F4F7"/>
+              <a:srgbClr val="F3F3F3"/>
             </a:solidFill>
             <a:prstDash val="solid"/>
           </a:ln>
@@ -10236,9 +10236,9 @@
                 <a:solidFill>
                   <a:srgbClr val="2E4258"/>
                 </a:solidFill>
-                <a:latin typeface="Arial" pitchFamily="34" charset="0"/>
-                <a:ea typeface="Arial" pitchFamily="34" charset="-122"/>
-                <a:cs typeface="Arial" pitchFamily="34" charset="-120"/>
+                <a:latin typeface="Inter" pitchFamily="34" charset="0"/>
+                <a:ea typeface="Inter" pitchFamily="34" charset="-122"/>
+                <a:cs typeface="Inter" pitchFamily="34" charset="-120"/>
               </a:rPr>
               <a:t>¿Forma de pago?</a:t>
             </a:r>
@@ -10278,9 +10278,9 @@
                 <a:solidFill>
                   <a:srgbClr val="2E4258"/>
                 </a:solidFill>
-                <a:latin typeface="Arial" pitchFamily="34" charset="0"/>
-                <a:ea typeface="Arial" pitchFamily="34" charset="-122"/>
-                <a:cs typeface="Arial" pitchFamily="34" charset="-120"/>
+                <a:latin typeface="Inter" pitchFamily="34" charset="0"/>
+                <a:ea typeface="Inter" pitchFamily="34" charset="-122"/>
+                <a:cs typeface="Inter" pitchFamily="34" charset="-120"/>
               </a:rPr>
               <a:t>¿En qué precio te gustaría vender?</a:t>
             </a:r>
@@ -10305,11 +10305,11 @@
             </a:avLst>
           </a:prstGeom>
           <a:solidFill>
-            <a:srgbClr val="F2F4F7"/>
+            <a:srgbClr val="F3F3F3"/>
           </a:solidFill>
           <a:ln w="12700">
             <a:solidFill>
-              <a:srgbClr val="F2F4F7"/>
+              <a:srgbClr val="F3F3F3"/>
             </a:solidFill>
             <a:prstDash val="solid"/>
           </a:ln>
@@ -10347,9 +10347,9 @@
                 <a:solidFill>
                   <a:srgbClr val="2E4258"/>
                 </a:solidFill>
-                <a:latin typeface="Arial" pitchFamily="34" charset="0"/>
-                <a:ea typeface="Arial" pitchFamily="34" charset="-122"/>
-                <a:cs typeface="Arial" pitchFamily="34" charset="-120"/>
+                <a:latin typeface="Inter" pitchFamily="34" charset="0"/>
+                <a:ea typeface="Inter" pitchFamily="34" charset="-122"/>
+                <a:cs typeface="Inter" pitchFamily="34" charset="-120"/>
               </a:rPr>
               <a:t>¿Ese valor lo tasaste con alguien? ¿Cuándo?</a:t>
             </a:r>
@@ -10413,9 +10413,9 @@
                 <a:solidFill>
                   <a:srgbClr val="FFFFFF"/>
                 </a:solidFill>
-                <a:latin typeface="Arial" pitchFamily="34" charset="0"/>
-                <a:ea typeface="Arial" pitchFamily="34" charset="-122"/>
-                <a:cs typeface="Arial" pitchFamily="34" charset="-120"/>
+                <a:latin typeface="Inter" pitchFamily="34" charset="0"/>
+                <a:ea typeface="Inter" pitchFamily="34" charset="-122"/>
+                <a:cs typeface="Inter" pitchFamily="34" charset="-120"/>
               </a:rPr>
               <a:t>LA PREGUNTA DE FONDO</a:t>
             </a:r>
@@ -10455,9 +10455,9 @@
                 <a:solidFill>
                   <a:srgbClr val="FFFFFF"/>
                 </a:solidFill>
-                <a:latin typeface="Arial" pitchFamily="34" charset="0"/>
-                <a:ea typeface="Arial" pitchFamily="34" charset="-122"/>
-                <a:cs typeface="Arial" pitchFamily="34" charset="-120"/>
+                <a:latin typeface="Inter" pitchFamily="34" charset="0"/>
+                <a:ea typeface="Inter" pitchFamily="34" charset="-122"/>
+                <a:cs typeface="Inter" pitchFamily="34" charset="-120"/>
               </a:rPr>
               <a:t>¿Este cliente es consciente, o es un delirante y estoy perdiendo el tiempo?</a:t>
             </a:r>
